--- a/assets/figures-editable/appendix-studies/a-e10.pptx
+++ b/assets/figures-editable/appendix-studies/a-e10.pptx
@@ -7,7 +7,7 @@
   <p:sldIdLst>
     <p:sldId id="256" r:id="rId7"/>
   </p:sldIdLst>
-  <p:sldSz cx="8961120" cy="5870448" type="screen4x3"/>
+  <p:sldSz cx="12191695" cy="6858000" type="screen4x3"/>
   <p:notesSz cx="6858000" cy="9144000"/>
   <p:defaultTextStyle>
     <a:defPPr>
@@ -3098,14 +3098,14 @@
       <p:grpSpPr/>
       <p:sp>
         <p:nvSpPr>
-          <p:cNvPr id="2" name="text 0" descr="sci-ppt:obj-000"/>
+          <p:cNvPr id="2" name="A-E10 text 0" descr="sci-ppt:o000"/>
           <p:cNvSpPr txBox="1"/>
           <p:nvPr/>
         </p:nvSpPr>
         <p:spPr>
           <a:xfrm>
-            <a:off x="256032" y="137160"/>
-            <a:ext cx="7315200" cy="310896"/>
+            <a:off x="274320" y="118872"/>
+            <a:ext cx="11612880" cy="340105"/>
           </a:xfrm>
           <a:prstGeom prst="rect">
             <a:avLst/>
@@ -3114,7 +3114,7 @@
           <a:effectLst/>
         </p:spPr>
         <p:txBody>
-          <a:bodyPr wrap="none" lIns="0" rIns="0" tIns="0" bIns="0" anchor="ctr">
+          <a:bodyPr wrap="none" lIns="18288" rIns="18288" tIns="18288" bIns="18288" anchor="t">
             <a:spAutoFit/>
           </a:bodyPr>
           <a:lstStyle/>
@@ -3125,67 +3125,2902 @@
               </a:spcAft>
             </a:pPr>
             <a:r>
-              <a:rPr sz="1439" b="0" i="0">
+              <a:rPr sz="1900" b="1" i="0">
                 <a:solidFill>
                   <a:srgbClr val="8EDBD4"/>
                 </a:solidFill>
                 <a:latin typeface="Arial"/>
               </a:rPr>
-              <a:t>A-E10 · Physical variable map</a:t>
-            </a:r>
-          </a:p>
-        </p:txBody>
-      </p:sp>
-      <p:sp>
-        <p:nvSpPr>
-          <p:cNvPr id="3" name="ellipse 1" descr="sci-ppt:obj-001"/>
-          <p:cNvSpPr/>
+              <a:t>A-E10 · Momentum law and explicitly evaluated integrals</a:t>
+            </a:r>
+          </a:p>
+        </p:txBody>
+      </p:sp>
+      <p:cxnSp>
+        <p:nvCxnSpPr>
+          <p:cNvPr id="3" name="A-E10 line 1" descr="sci-ppt:o001"/>
+          <p:cNvCxnSpPr/>
           <p:nvPr/>
-        </p:nvSpPr>
-        <p:spPr>
-          <a:xfrm>
-            <a:off x="1060704" y="914400"/>
-            <a:ext cx="1463040" cy="1463040"/>
-          </a:xfrm>
-          <a:prstGeom prst="ellipse">
+        </p:nvCxnSpPr>
+        <p:spPr>
+          <a:xfrm>
+            <a:off x="914400" y="5029200"/>
+            <a:ext cx="5669280" cy="0"/>
+          </a:xfrm>
+          <a:prstGeom prst="line">
             <a:avLst/>
           </a:prstGeom>
-          <a:noFill/>
-          <a:ln w="17780">
+          <a:ln w="19050">
             <a:solidFill>
               <a:srgbClr val="B4C7D2"/>
             </a:solidFill>
           </a:ln>
           <a:effectLst/>
         </p:spPr>
-        <p:txBody>
-          <a:bodyPr rtlCol="0" anchor="ctr"/>
-          <a:lstStyle/>
-          <a:p>
-            <a:pPr algn="ctr"/>
-          </a:p>
-        </p:txBody>
-      </p:sp>
-      <p:sp>
-        <p:nvSpPr>
-          <p:cNvPr id="4" name="ellipse 2" descr="sci-ppt:obj-002"/>
+      </p:cxnSp>
+      <p:cxnSp>
+        <p:nvCxnSpPr>
+          <p:cNvPr id="4" name="A-E10 line 2" descr="sci-ppt:o002"/>
+          <p:cNvCxnSpPr/>
+          <p:nvPr/>
+        </p:nvCxnSpPr>
+        <p:spPr>
+          <a:xfrm>
+            <a:off x="914400" y="1371600"/>
+            <a:ext cx="0" cy="3657600"/>
+          </a:xfrm>
+          <a:prstGeom prst="line">
+            <a:avLst/>
+          </a:prstGeom>
+          <a:ln w="19050">
+            <a:solidFill>
+              <a:srgbClr val="B4C7D2"/>
+            </a:solidFill>
+          </a:ln>
+          <a:effectLst/>
+        </p:spPr>
+      </p:cxnSp>
+      <p:cxnSp>
+        <p:nvCxnSpPr>
+          <p:cNvPr id="5" name="A-E10 line 3" descr="sci-ppt:o003"/>
+          <p:cNvCxnSpPr/>
+          <p:nvPr/>
+        </p:nvCxnSpPr>
+        <p:spPr>
+          <a:xfrm>
+            <a:off x="914400" y="5029200"/>
+            <a:ext cx="0" cy="64008"/>
+          </a:xfrm>
+          <a:prstGeom prst="line">
+            <a:avLst/>
+          </a:prstGeom>
+          <a:ln w="12700">
+            <a:solidFill>
+              <a:srgbClr val="B4C7D2"/>
+            </a:solidFill>
+          </a:ln>
+          <a:effectLst/>
+        </p:spPr>
+      </p:cxnSp>
+      <p:cxnSp>
+        <p:nvCxnSpPr>
+          <p:cNvPr id="6" name="A-E10 line 4" descr="sci-ppt:o004"/>
+          <p:cNvCxnSpPr/>
+          <p:nvPr/>
+        </p:nvCxnSpPr>
+        <p:spPr>
+          <a:xfrm>
+            <a:off x="914400" y="1371600"/>
+            <a:ext cx="0" cy="3657600"/>
+          </a:xfrm>
+          <a:prstGeom prst="line">
+            <a:avLst/>
+          </a:prstGeom>
+          <a:ln w="7620">
+            <a:solidFill>
+              <a:srgbClr val="2E4756"/>
+            </a:solidFill>
+          </a:ln>
+          <a:effectLst/>
+        </p:spPr>
+      </p:cxnSp>
+      <p:sp>
+        <p:nvSpPr>
+          <p:cNvPr id="7" name="A-E10 text 5" descr="sci-ppt:o005"/>
+          <p:cNvSpPr txBox="1"/>
+          <p:nvPr/>
+        </p:nvSpPr>
+        <p:spPr>
+          <a:xfrm>
+            <a:off x="457200" y="5111496"/>
+            <a:ext cx="914400" cy="208407"/>
+          </a:xfrm>
+          <a:prstGeom prst="rect">
+            <a:avLst/>
+          </a:prstGeom>
+          <a:noFill/>
+          <a:effectLst/>
+        </p:spPr>
+        <p:txBody>
+          <a:bodyPr wrap="none" lIns="18288" rIns="18288" tIns="18288" bIns="18288" anchor="t">
+            <a:spAutoFit/>
+          </a:bodyPr>
+          <a:lstStyle/>
+          <a:p>
+            <a:pPr algn="ctr">
+              <a:spcAft>
+                <a:spcPts val="0"/>
+              </a:spcAft>
+            </a:pPr>
+            <a:r>
+              <a:rPr sz="1050" b="0" i="0">
+                <a:solidFill>
+                  <a:srgbClr val="B4C7D2"/>
+                </a:solidFill>
+                <a:latin typeface="Arial"/>
+              </a:rPr>
+              <a:t>1</a:t>
+            </a:r>
+          </a:p>
+        </p:txBody>
+      </p:sp>
+      <p:cxnSp>
+        <p:nvCxnSpPr>
+          <p:cNvPr id="8" name="A-E10 line 6" descr="sci-ppt:o006"/>
+          <p:cNvCxnSpPr/>
+          <p:nvPr/>
+        </p:nvCxnSpPr>
+        <p:spPr>
+          <a:xfrm>
+            <a:off x="2048256" y="5029200"/>
+            <a:ext cx="0" cy="64008"/>
+          </a:xfrm>
+          <a:prstGeom prst="line">
+            <a:avLst/>
+          </a:prstGeom>
+          <a:ln w="12700">
+            <a:solidFill>
+              <a:srgbClr val="B4C7D2"/>
+            </a:solidFill>
+          </a:ln>
+          <a:effectLst/>
+        </p:spPr>
+      </p:cxnSp>
+      <p:cxnSp>
+        <p:nvCxnSpPr>
+          <p:cNvPr id="9" name="A-E10 line 7" descr="sci-ppt:o007"/>
+          <p:cNvCxnSpPr/>
+          <p:nvPr/>
+        </p:nvCxnSpPr>
+        <p:spPr>
+          <a:xfrm>
+            <a:off x="2048256" y="1371600"/>
+            <a:ext cx="0" cy="3657600"/>
+          </a:xfrm>
+          <a:prstGeom prst="line">
+            <a:avLst/>
+          </a:prstGeom>
+          <a:ln w="7620">
+            <a:solidFill>
+              <a:srgbClr val="2E4756"/>
+            </a:solidFill>
+          </a:ln>
+          <a:effectLst/>
+        </p:spPr>
+      </p:cxnSp>
+      <p:sp>
+        <p:nvSpPr>
+          <p:cNvPr id="10" name="A-E10 text 8" descr="sci-ppt:o008"/>
+          <p:cNvSpPr txBox="1"/>
+          <p:nvPr/>
+        </p:nvSpPr>
+        <p:spPr>
+          <a:xfrm>
+            <a:off x="1591056" y="5111496"/>
+            <a:ext cx="914400" cy="208407"/>
+          </a:xfrm>
+          <a:prstGeom prst="rect">
+            <a:avLst/>
+          </a:prstGeom>
+          <a:noFill/>
+          <a:effectLst/>
+        </p:spPr>
+        <p:txBody>
+          <a:bodyPr wrap="none" lIns="18288" rIns="18288" tIns="18288" bIns="18288" anchor="t">
+            <a:spAutoFit/>
+          </a:bodyPr>
+          <a:lstStyle/>
+          <a:p>
+            <a:pPr algn="ctr">
+              <a:spcAft>
+                <a:spcPts val="0"/>
+              </a:spcAft>
+            </a:pPr>
+            <a:r>
+              <a:rPr sz="1050" b="0" i="0">
+                <a:solidFill>
+                  <a:srgbClr val="B4C7D2"/>
+                </a:solidFill>
+                <a:latin typeface="Arial"/>
+              </a:rPr>
+              <a:t>2</a:t>
+            </a:r>
+          </a:p>
+        </p:txBody>
+      </p:sp>
+      <p:cxnSp>
+        <p:nvCxnSpPr>
+          <p:cNvPr id="11" name="A-E10 line 9" descr="sci-ppt:o009"/>
+          <p:cNvCxnSpPr/>
+          <p:nvPr/>
+        </p:nvCxnSpPr>
+        <p:spPr>
+          <a:xfrm>
+            <a:off x="3182112" y="5029200"/>
+            <a:ext cx="0" cy="64008"/>
+          </a:xfrm>
+          <a:prstGeom prst="line">
+            <a:avLst/>
+          </a:prstGeom>
+          <a:ln w="12700">
+            <a:solidFill>
+              <a:srgbClr val="B4C7D2"/>
+            </a:solidFill>
+          </a:ln>
+          <a:effectLst/>
+        </p:spPr>
+      </p:cxnSp>
+      <p:cxnSp>
+        <p:nvCxnSpPr>
+          <p:cNvPr id="12" name="A-E10 line 10" descr="sci-ppt:o010"/>
+          <p:cNvCxnSpPr/>
+          <p:nvPr/>
+        </p:nvCxnSpPr>
+        <p:spPr>
+          <a:xfrm>
+            <a:off x="3182112" y="1371600"/>
+            <a:ext cx="0" cy="3657600"/>
+          </a:xfrm>
+          <a:prstGeom prst="line">
+            <a:avLst/>
+          </a:prstGeom>
+          <a:ln w="7620">
+            <a:solidFill>
+              <a:srgbClr val="2E4756"/>
+            </a:solidFill>
+          </a:ln>
+          <a:effectLst/>
+        </p:spPr>
+      </p:cxnSp>
+      <p:sp>
+        <p:nvSpPr>
+          <p:cNvPr id="13" name="A-E10 text 11" descr="sci-ppt:o011"/>
+          <p:cNvSpPr txBox="1"/>
+          <p:nvPr/>
+        </p:nvSpPr>
+        <p:spPr>
+          <a:xfrm>
+            <a:off x="2724912" y="5111496"/>
+            <a:ext cx="914400" cy="208407"/>
+          </a:xfrm>
+          <a:prstGeom prst="rect">
+            <a:avLst/>
+          </a:prstGeom>
+          <a:noFill/>
+          <a:effectLst/>
+        </p:spPr>
+        <p:txBody>
+          <a:bodyPr wrap="none" lIns="18288" rIns="18288" tIns="18288" bIns="18288" anchor="t">
+            <a:spAutoFit/>
+          </a:bodyPr>
+          <a:lstStyle/>
+          <a:p>
+            <a:pPr algn="ctr">
+              <a:spcAft>
+                <a:spcPts val="0"/>
+              </a:spcAft>
+            </a:pPr>
+            <a:r>
+              <a:rPr sz="1050" b="0" i="0">
+                <a:solidFill>
+                  <a:srgbClr val="B4C7D2"/>
+                </a:solidFill>
+                <a:latin typeface="Arial"/>
+              </a:rPr>
+              <a:t>3</a:t>
+            </a:r>
+          </a:p>
+        </p:txBody>
+      </p:sp>
+      <p:cxnSp>
+        <p:nvCxnSpPr>
+          <p:cNvPr id="14" name="A-E10 line 12" descr="sci-ppt:o012"/>
+          <p:cNvCxnSpPr/>
+          <p:nvPr/>
+        </p:nvCxnSpPr>
+        <p:spPr>
+          <a:xfrm>
+            <a:off x="4315968" y="5029200"/>
+            <a:ext cx="0" cy="64008"/>
+          </a:xfrm>
+          <a:prstGeom prst="line">
+            <a:avLst/>
+          </a:prstGeom>
+          <a:ln w="12700">
+            <a:solidFill>
+              <a:srgbClr val="B4C7D2"/>
+            </a:solidFill>
+          </a:ln>
+          <a:effectLst/>
+        </p:spPr>
+      </p:cxnSp>
+      <p:cxnSp>
+        <p:nvCxnSpPr>
+          <p:cNvPr id="15" name="A-E10 line 13" descr="sci-ppt:o013"/>
+          <p:cNvCxnSpPr/>
+          <p:nvPr/>
+        </p:nvCxnSpPr>
+        <p:spPr>
+          <a:xfrm>
+            <a:off x="4315968" y="1371600"/>
+            <a:ext cx="0" cy="3657600"/>
+          </a:xfrm>
+          <a:prstGeom prst="line">
+            <a:avLst/>
+          </a:prstGeom>
+          <a:ln w="7620">
+            <a:solidFill>
+              <a:srgbClr val="2E4756"/>
+            </a:solidFill>
+          </a:ln>
+          <a:effectLst/>
+        </p:spPr>
+      </p:cxnSp>
+      <p:sp>
+        <p:nvSpPr>
+          <p:cNvPr id="16" name="A-E10 text 14" descr="sci-ppt:o014"/>
+          <p:cNvSpPr txBox="1"/>
+          <p:nvPr/>
+        </p:nvSpPr>
+        <p:spPr>
+          <a:xfrm>
+            <a:off x="3858768" y="5111496"/>
+            <a:ext cx="914400" cy="208407"/>
+          </a:xfrm>
+          <a:prstGeom prst="rect">
+            <a:avLst/>
+          </a:prstGeom>
+          <a:noFill/>
+          <a:effectLst/>
+        </p:spPr>
+        <p:txBody>
+          <a:bodyPr wrap="none" lIns="18288" rIns="18288" tIns="18288" bIns="18288" anchor="t">
+            <a:spAutoFit/>
+          </a:bodyPr>
+          <a:lstStyle/>
+          <a:p>
+            <a:pPr algn="ctr">
+              <a:spcAft>
+                <a:spcPts val="0"/>
+              </a:spcAft>
+            </a:pPr>
+            <a:r>
+              <a:rPr sz="1050" b="0" i="0">
+                <a:solidFill>
+                  <a:srgbClr val="B4C7D2"/>
+                </a:solidFill>
+                <a:latin typeface="Arial"/>
+              </a:rPr>
+              <a:t>4</a:t>
+            </a:r>
+          </a:p>
+        </p:txBody>
+      </p:sp>
+      <p:cxnSp>
+        <p:nvCxnSpPr>
+          <p:cNvPr id="17" name="A-E10 line 15" descr="sci-ppt:o015"/>
+          <p:cNvCxnSpPr/>
+          <p:nvPr/>
+        </p:nvCxnSpPr>
+        <p:spPr>
+          <a:xfrm>
+            <a:off x="5449824" y="5029200"/>
+            <a:ext cx="0" cy="64008"/>
+          </a:xfrm>
+          <a:prstGeom prst="line">
+            <a:avLst/>
+          </a:prstGeom>
+          <a:ln w="12700">
+            <a:solidFill>
+              <a:srgbClr val="B4C7D2"/>
+            </a:solidFill>
+          </a:ln>
+          <a:effectLst/>
+        </p:spPr>
+      </p:cxnSp>
+      <p:cxnSp>
+        <p:nvCxnSpPr>
+          <p:cNvPr id="18" name="A-E10 line 16" descr="sci-ppt:o016"/>
+          <p:cNvCxnSpPr/>
+          <p:nvPr/>
+        </p:nvCxnSpPr>
+        <p:spPr>
+          <a:xfrm>
+            <a:off x="5449824" y="1371600"/>
+            <a:ext cx="0" cy="3657600"/>
+          </a:xfrm>
+          <a:prstGeom prst="line">
+            <a:avLst/>
+          </a:prstGeom>
+          <a:ln w="7620">
+            <a:solidFill>
+              <a:srgbClr val="2E4756"/>
+            </a:solidFill>
+          </a:ln>
+          <a:effectLst/>
+        </p:spPr>
+      </p:cxnSp>
+      <p:sp>
+        <p:nvSpPr>
+          <p:cNvPr id="19" name="A-E10 text 17" descr="sci-ppt:o017"/>
+          <p:cNvSpPr txBox="1"/>
+          <p:nvPr/>
+        </p:nvSpPr>
+        <p:spPr>
+          <a:xfrm>
+            <a:off x="4992624" y="5111496"/>
+            <a:ext cx="914400" cy="208407"/>
+          </a:xfrm>
+          <a:prstGeom prst="rect">
+            <a:avLst/>
+          </a:prstGeom>
+          <a:noFill/>
+          <a:effectLst/>
+        </p:spPr>
+        <p:txBody>
+          <a:bodyPr wrap="none" lIns="18288" rIns="18288" tIns="18288" bIns="18288" anchor="t">
+            <a:spAutoFit/>
+          </a:bodyPr>
+          <a:lstStyle/>
+          <a:p>
+            <a:pPr algn="ctr">
+              <a:spcAft>
+                <a:spcPts val="0"/>
+              </a:spcAft>
+            </a:pPr>
+            <a:r>
+              <a:rPr sz="1050" b="0" i="0">
+                <a:solidFill>
+                  <a:srgbClr val="B4C7D2"/>
+                </a:solidFill>
+                <a:latin typeface="Arial"/>
+              </a:rPr>
+              <a:t>5</a:t>
+            </a:r>
+          </a:p>
+        </p:txBody>
+      </p:sp>
+      <p:cxnSp>
+        <p:nvCxnSpPr>
+          <p:cNvPr id="20" name="A-E10 line 18" descr="sci-ppt:o018"/>
+          <p:cNvCxnSpPr/>
+          <p:nvPr/>
+        </p:nvCxnSpPr>
+        <p:spPr>
+          <a:xfrm>
+            <a:off x="6583680" y="5029200"/>
+            <a:ext cx="0" cy="64008"/>
+          </a:xfrm>
+          <a:prstGeom prst="line">
+            <a:avLst/>
+          </a:prstGeom>
+          <a:ln w="12700">
+            <a:solidFill>
+              <a:srgbClr val="B4C7D2"/>
+            </a:solidFill>
+          </a:ln>
+          <a:effectLst/>
+        </p:spPr>
+      </p:cxnSp>
+      <p:cxnSp>
+        <p:nvCxnSpPr>
+          <p:cNvPr id="21" name="A-E10 line 19" descr="sci-ppt:o019"/>
+          <p:cNvCxnSpPr/>
+          <p:nvPr/>
+        </p:nvCxnSpPr>
+        <p:spPr>
+          <a:xfrm>
+            <a:off x="6583680" y="1371600"/>
+            <a:ext cx="0" cy="3657600"/>
+          </a:xfrm>
+          <a:prstGeom prst="line">
+            <a:avLst/>
+          </a:prstGeom>
+          <a:ln w="7620">
+            <a:solidFill>
+              <a:srgbClr val="2E4756"/>
+            </a:solidFill>
+          </a:ln>
+          <a:effectLst/>
+        </p:spPr>
+      </p:cxnSp>
+      <p:sp>
+        <p:nvSpPr>
+          <p:cNvPr id="22" name="A-E10 text 20" descr="sci-ppt:o020"/>
+          <p:cNvSpPr txBox="1"/>
+          <p:nvPr/>
+        </p:nvSpPr>
+        <p:spPr>
+          <a:xfrm>
+            <a:off x="6126480" y="5111496"/>
+            <a:ext cx="914400" cy="208407"/>
+          </a:xfrm>
+          <a:prstGeom prst="rect">
+            <a:avLst/>
+          </a:prstGeom>
+          <a:noFill/>
+          <a:effectLst/>
+        </p:spPr>
+        <p:txBody>
+          <a:bodyPr wrap="none" lIns="18288" rIns="18288" tIns="18288" bIns="18288" anchor="t">
+            <a:spAutoFit/>
+          </a:bodyPr>
+          <a:lstStyle/>
+          <a:p>
+            <a:pPr algn="ctr">
+              <a:spcAft>
+                <a:spcPts val="0"/>
+              </a:spcAft>
+            </a:pPr>
+            <a:r>
+              <a:rPr sz="1050" b="0" i="0">
+                <a:solidFill>
+                  <a:srgbClr val="B4C7D2"/>
+                </a:solidFill>
+                <a:latin typeface="Arial"/>
+              </a:rPr>
+              <a:t>6</a:t>
+            </a:r>
+          </a:p>
+        </p:txBody>
+      </p:sp>
+      <p:cxnSp>
+        <p:nvCxnSpPr>
+          <p:cNvPr id="23" name="A-E10 line 21" descr="sci-ppt:o021"/>
+          <p:cNvCxnSpPr/>
+          <p:nvPr/>
+        </p:nvCxnSpPr>
+        <p:spPr>
+          <a:xfrm>
+            <a:off x="850392" y="5029200"/>
+            <a:ext cx="64008" cy="0"/>
+          </a:xfrm>
+          <a:prstGeom prst="line">
+            <a:avLst/>
+          </a:prstGeom>
+          <a:ln w="12700">
+            <a:solidFill>
+              <a:srgbClr val="B4C7D2"/>
+            </a:solidFill>
+          </a:ln>
+          <a:effectLst/>
+        </p:spPr>
+      </p:cxnSp>
+      <p:cxnSp>
+        <p:nvCxnSpPr>
+          <p:cNvPr id="24" name="A-E10 line 22" descr="sci-ppt:o022"/>
+          <p:cNvCxnSpPr/>
+          <p:nvPr/>
+        </p:nvCxnSpPr>
+        <p:spPr>
+          <a:xfrm>
+            <a:off x="850392" y="4066673"/>
+            <a:ext cx="64008" cy="0"/>
+          </a:xfrm>
+          <a:prstGeom prst="line">
+            <a:avLst/>
+          </a:prstGeom>
+          <a:ln w="12700">
+            <a:solidFill>
+              <a:srgbClr val="B4C7D2"/>
+            </a:solidFill>
+          </a:ln>
+          <a:effectLst/>
+        </p:spPr>
+      </p:cxnSp>
+      <p:cxnSp>
+        <p:nvCxnSpPr>
+          <p:cNvPr id="25" name="A-E10 line 23" descr="sci-ppt:o023"/>
+          <p:cNvCxnSpPr/>
+          <p:nvPr/>
+        </p:nvCxnSpPr>
+        <p:spPr>
+          <a:xfrm>
+            <a:off x="914400" y="4066673"/>
+            <a:ext cx="5669280" cy="0"/>
+          </a:xfrm>
+          <a:prstGeom prst="line">
+            <a:avLst/>
+          </a:prstGeom>
+          <a:ln w="7620">
+            <a:solidFill>
+              <a:srgbClr val="2E4756"/>
+            </a:solidFill>
+          </a:ln>
+          <a:effectLst/>
+        </p:spPr>
+      </p:cxnSp>
+      <p:sp>
+        <p:nvSpPr>
+          <p:cNvPr id="26" name="A-E10 text 24" descr="sci-ppt:o024"/>
+          <p:cNvSpPr txBox="1"/>
+          <p:nvPr/>
+        </p:nvSpPr>
+        <p:spPr>
+          <a:xfrm>
+            <a:off x="45720" y="3984377"/>
+            <a:ext cx="777240" cy="208407"/>
+          </a:xfrm>
+          <a:prstGeom prst="rect">
+            <a:avLst/>
+          </a:prstGeom>
+          <a:noFill/>
+          <a:effectLst/>
+        </p:spPr>
+        <p:txBody>
+          <a:bodyPr wrap="none" lIns="18288" rIns="18288" tIns="18288" bIns="18288" anchor="t">
+            <a:spAutoFit/>
+          </a:bodyPr>
+          <a:lstStyle/>
+          <a:p>
+            <a:pPr algn="r">
+              <a:spcAft>
+                <a:spcPts val="0"/>
+              </a:spcAft>
+            </a:pPr>
+            <a:r>
+              <a:rPr sz="1050" b="0" i="0">
+                <a:solidFill>
+                  <a:srgbClr val="B4C7D2"/>
+                </a:solidFill>
+                <a:latin typeface="Arial"/>
+              </a:rPr>
+              <a:t>2500</a:t>
+            </a:r>
+          </a:p>
+        </p:txBody>
+      </p:sp>
+      <p:cxnSp>
+        <p:nvCxnSpPr>
+          <p:cNvPr id="27" name="A-E10 line 25" descr="sci-ppt:o025"/>
+          <p:cNvCxnSpPr/>
+          <p:nvPr/>
+        </p:nvCxnSpPr>
+        <p:spPr>
+          <a:xfrm>
+            <a:off x="850392" y="3104147"/>
+            <a:ext cx="64008" cy="0"/>
+          </a:xfrm>
+          <a:prstGeom prst="line">
+            <a:avLst/>
+          </a:prstGeom>
+          <a:ln w="12700">
+            <a:solidFill>
+              <a:srgbClr val="B4C7D2"/>
+            </a:solidFill>
+          </a:ln>
+          <a:effectLst/>
+        </p:spPr>
+      </p:cxnSp>
+      <p:cxnSp>
+        <p:nvCxnSpPr>
+          <p:cNvPr id="28" name="A-E10 line 26" descr="sci-ppt:o026"/>
+          <p:cNvCxnSpPr/>
+          <p:nvPr/>
+        </p:nvCxnSpPr>
+        <p:spPr>
+          <a:xfrm>
+            <a:off x="914400" y="3104147"/>
+            <a:ext cx="5669280" cy="0"/>
+          </a:xfrm>
+          <a:prstGeom prst="line">
+            <a:avLst/>
+          </a:prstGeom>
+          <a:ln w="7620">
+            <a:solidFill>
+              <a:srgbClr val="2E4756"/>
+            </a:solidFill>
+          </a:ln>
+          <a:effectLst/>
+        </p:spPr>
+      </p:cxnSp>
+      <p:sp>
+        <p:nvSpPr>
+          <p:cNvPr id="29" name="A-E10 text 27" descr="sci-ppt:o027"/>
+          <p:cNvSpPr txBox="1"/>
+          <p:nvPr/>
+        </p:nvSpPr>
+        <p:spPr>
+          <a:xfrm>
+            <a:off x="45720" y="3021851"/>
+            <a:ext cx="777240" cy="208407"/>
+          </a:xfrm>
+          <a:prstGeom prst="rect">
+            <a:avLst/>
+          </a:prstGeom>
+          <a:noFill/>
+          <a:effectLst/>
+        </p:spPr>
+        <p:txBody>
+          <a:bodyPr wrap="none" lIns="18288" rIns="18288" tIns="18288" bIns="18288" anchor="t">
+            <a:spAutoFit/>
+          </a:bodyPr>
+          <a:lstStyle/>
+          <a:p>
+            <a:pPr algn="r">
+              <a:spcAft>
+                <a:spcPts val="0"/>
+              </a:spcAft>
+            </a:pPr>
+            <a:r>
+              <a:rPr sz="1050" b="0" i="0">
+                <a:solidFill>
+                  <a:srgbClr val="B4C7D2"/>
+                </a:solidFill>
+                <a:latin typeface="Arial"/>
+              </a:rPr>
+              <a:t>5000</a:t>
+            </a:r>
+          </a:p>
+        </p:txBody>
+      </p:sp>
+      <p:cxnSp>
+        <p:nvCxnSpPr>
+          <p:cNvPr id="30" name="A-E10 line 28" descr="sci-ppt:o028"/>
+          <p:cNvCxnSpPr/>
+          <p:nvPr/>
+        </p:nvCxnSpPr>
+        <p:spPr>
+          <a:xfrm>
+            <a:off x="850392" y="2141621"/>
+            <a:ext cx="64008" cy="0"/>
+          </a:xfrm>
+          <a:prstGeom prst="line">
+            <a:avLst/>
+          </a:prstGeom>
+          <a:ln w="12700">
+            <a:solidFill>
+              <a:srgbClr val="B4C7D2"/>
+            </a:solidFill>
+          </a:ln>
+          <a:effectLst/>
+        </p:spPr>
+      </p:cxnSp>
+      <p:cxnSp>
+        <p:nvCxnSpPr>
+          <p:cNvPr id="31" name="A-E10 line 29" descr="sci-ppt:o029"/>
+          <p:cNvCxnSpPr/>
+          <p:nvPr/>
+        </p:nvCxnSpPr>
+        <p:spPr>
+          <a:xfrm>
+            <a:off x="914400" y="2141621"/>
+            <a:ext cx="5669280" cy="0"/>
+          </a:xfrm>
+          <a:prstGeom prst="line">
+            <a:avLst/>
+          </a:prstGeom>
+          <a:ln w="7620">
+            <a:solidFill>
+              <a:srgbClr val="2E4756"/>
+            </a:solidFill>
+          </a:ln>
+          <a:effectLst/>
+        </p:spPr>
+      </p:cxnSp>
+      <p:sp>
+        <p:nvSpPr>
+          <p:cNvPr id="32" name="A-E10 text 30" descr="sci-ppt:o030"/>
+          <p:cNvSpPr txBox="1"/>
+          <p:nvPr/>
+        </p:nvSpPr>
+        <p:spPr>
+          <a:xfrm>
+            <a:off x="45720" y="2059325"/>
+            <a:ext cx="777240" cy="208407"/>
+          </a:xfrm>
+          <a:prstGeom prst="rect">
+            <a:avLst/>
+          </a:prstGeom>
+          <a:noFill/>
+          <a:effectLst/>
+        </p:spPr>
+        <p:txBody>
+          <a:bodyPr wrap="none" lIns="18288" rIns="18288" tIns="18288" bIns="18288" anchor="t">
+            <a:spAutoFit/>
+          </a:bodyPr>
+          <a:lstStyle/>
+          <a:p>
+            <a:pPr algn="r">
+              <a:spcAft>
+                <a:spcPts val="0"/>
+              </a:spcAft>
+            </a:pPr>
+            <a:r>
+              <a:rPr sz="1050" b="0" i="0">
+                <a:solidFill>
+                  <a:srgbClr val="B4C7D2"/>
+                </a:solidFill>
+                <a:latin typeface="Arial"/>
+              </a:rPr>
+              <a:t>7500</a:t>
+            </a:r>
+          </a:p>
+        </p:txBody>
+      </p:sp>
+      <p:sp>
+        <p:nvSpPr>
+          <p:cNvPr id="33" name="A-E10 text 31" descr="sci-ppt:o031"/>
+          <p:cNvSpPr txBox="1"/>
+          <p:nvPr/>
+        </p:nvSpPr>
+        <p:spPr>
+          <a:xfrm>
+            <a:off x="914400" y="5312664"/>
+            <a:ext cx="5669280" cy="231648"/>
+          </a:xfrm>
+          <a:prstGeom prst="rect">
+            <a:avLst/>
+          </a:prstGeom>
+          <a:noFill/>
+          <a:effectLst/>
+        </p:spPr>
+        <p:txBody>
+          <a:bodyPr wrap="none" lIns="18288" rIns="18288" tIns="18288" bIns="18288" anchor="t">
+            <a:spAutoFit/>
+          </a:bodyPr>
+          <a:lstStyle/>
+          <a:p>
+            <a:pPr algn="ctr">
+              <a:spcAft>
+                <a:spcPts val="0"/>
+              </a:spcAft>
+            </a:pPr>
+            <a:r>
+              <a:rPr sz="1200" b="0" i="0">
+                <a:solidFill>
+                  <a:srgbClr val="E7F0F3"/>
+                </a:solidFill>
+                <a:latin typeface="Arial"/>
+              </a:rPr>
+              <a:t>r / R</a:t>
+            </a:r>
+          </a:p>
+        </p:txBody>
+      </p:sp>
+      <p:sp>
+        <p:nvSpPr>
+          <p:cNvPr id="34" name="A-E10 text 32" descr="sci-ppt:o032"/>
+          <p:cNvSpPr txBox="1"/>
+          <p:nvPr/>
+        </p:nvSpPr>
+        <p:spPr>
+          <a:xfrm>
+            <a:off x="365760" y="1024128"/>
+            <a:ext cx="5669280" cy="231648"/>
+          </a:xfrm>
+          <a:prstGeom prst="rect">
+            <a:avLst/>
+          </a:prstGeom>
+          <a:noFill/>
+          <a:effectLst/>
+        </p:spPr>
+        <p:txBody>
+          <a:bodyPr wrap="none" lIns="18288" rIns="18288" tIns="18288" bIns="18288" anchor="t">
+            <a:spAutoFit/>
+          </a:bodyPr>
+          <a:lstStyle/>
+          <a:p>
+            <a:pPr algn="l">
+              <a:spcAft>
+                <a:spcPts val="0"/>
+              </a:spcAft>
+            </a:pPr>
+            <a:r>
+              <a:rPr sz="1200" b="0" i="0">
+                <a:solidFill>
+                  <a:srgbClr val="E7F0F3"/>
+                </a:solidFill>
+                <a:latin typeface="Arial"/>
+              </a:rPr>
+              <a:t>aᵣ  (10³ m/s²)</a:t>
+            </a:r>
+          </a:p>
+        </p:txBody>
+      </p:sp>
+      <p:sp>
+        <p:nvSpPr>
+          <p:cNvPr id="35" name="A-E10 polygon 33" descr="sci-ppt:o033"/>
           <p:cNvSpPr/>
           <p:nvPr/>
         </p:nvSpPr>
         <p:spPr>
           <a:xfrm>
-            <a:off x="1463040" y="1316736"/>
-            <a:ext cx="658368" cy="658368"/>
-          </a:xfrm>
-          <a:prstGeom prst="ellipse">
+            <a:off x="914400" y="3734815"/>
+            <a:ext cx="5669280" cy="1294385"/>
+          </a:xfrm>
+          <a:custGeom>
+            <a:avLst/>
+            <a:gdLst/>
+            <a:ahLst/>
+            <a:cxnLst/>
+            <a:rect l="l" t="t" r="r" b="b"/>
+            <a:pathLst>
+              <a:path w="5669280" h="1294385">
+                <a:moveTo>
+                  <a:pt x="0" y="524363"/>
+                </a:moveTo>
+                <a:lnTo>
+                  <a:pt x="28488" y="386420"/>
+                </a:lnTo>
+                <a:lnTo>
+                  <a:pt x="56977" y="277996"/>
+                </a:lnTo>
+                <a:lnTo>
+                  <a:pt x="85466" y="193755"/>
+                </a:lnTo>
+                <a:lnTo>
+                  <a:pt x="113955" y="129357"/>
+                </a:lnTo>
+                <a:lnTo>
+                  <a:pt x="142444" y="81262"/>
+                </a:lnTo>
+                <a:lnTo>
+                  <a:pt x="170933" y="46568"/>
+                </a:lnTo>
+                <a:lnTo>
+                  <a:pt x="199421" y="22893"/>
+                </a:lnTo>
+                <a:lnTo>
+                  <a:pt x="227910" y="8273"/>
+                </a:lnTo>
+                <a:lnTo>
+                  <a:pt x="256399" y="1089"/>
+                </a:lnTo>
+                <a:lnTo>
+                  <a:pt x="284888" y="0"/>
+                </a:lnTo>
+                <a:lnTo>
+                  <a:pt x="313377" y="3893"/>
+                </a:lnTo>
+                <a:lnTo>
+                  <a:pt x="341866" y="11845"/>
+                </a:lnTo>
+                <a:lnTo>
+                  <a:pt x="370354" y="23088"/>
+                </a:lnTo>
+                <a:lnTo>
+                  <a:pt x="398843" y="36980"/>
+                </a:lnTo>
+                <a:lnTo>
+                  <a:pt x="427332" y="52989"/>
+                </a:lnTo>
+                <a:lnTo>
+                  <a:pt x="455821" y="70668"/>
+                </a:lnTo>
+                <a:lnTo>
+                  <a:pt x="484310" y="89648"/>
+                </a:lnTo>
+                <a:lnTo>
+                  <a:pt x="512799" y="109616"/>
+                </a:lnTo>
+                <a:lnTo>
+                  <a:pt x="541288" y="130314"/>
+                </a:lnTo>
+                <a:lnTo>
+                  <a:pt x="569776" y="151527"/>
+                </a:lnTo>
+                <a:lnTo>
+                  <a:pt x="598265" y="173074"/>
+                </a:lnTo>
+                <a:lnTo>
+                  <a:pt x="626754" y="194806"/>
+                </a:lnTo>
+                <a:lnTo>
+                  <a:pt x="655243" y="216599"/>
+                </a:lnTo>
+                <a:lnTo>
+                  <a:pt x="683732" y="238352"/>
+                </a:lnTo>
+                <a:lnTo>
+                  <a:pt x="712221" y="259978"/>
+                </a:lnTo>
+                <a:lnTo>
+                  <a:pt x="740709" y="281410"/>
+                </a:lnTo>
+                <a:lnTo>
+                  <a:pt x="769198" y="302591"/>
+                </a:lnTo>
+                <a:lnTo>
+                  <a:pt x="797687" y="323476"/>
+                </a:lnTo>
+                <a:lnTo>
+                  <a:pt x="826176" y="344028"/>
+                </a:lnTo>
+                <a:lnTo>
+                  <a:pt x="854665" y="364219"/>
+                </a:lnTo>
+                <a:lnTo>
+                  <a:pt x="883154" y="384027"/>
+                </a:lnTo>
+                <a:lnTo>
+                  <a:pt x="911643" y="403436"/>
+                </a:lnTo>
+                <a:lnTo>
+                  <a:pt x="940131" y="422434"/>
+                </a:lnTo>
+                <a:lnTo>
+                  <a:pt x="968620" y="441012"/>
+                </a:lnTo>
+                <a:lnTo>
+                  <a:pt x="997109" y="459167"/>
+                </a:lnTo>
+                <a:lnTo>
+                  <a:pt x="1025598" y="476895"/>
+                </a:lnTo>
+                <a:lnTo>
+                  <a:pt x="1054087" y="494198"/>
+                </a:lnTo>
+                <a:lnTo>
+                  <a:pt x="1082576" y="511077"/>
+                </a:lnTo>
+                <a:lnTo>
+                  <a:pt x="1111064" y="527537"/>
+                </a:lnTo>
+                <a:lnTo>
+                  <a:pt x="1139553" y="543582"/>
+                </a:lnTo>
+                <a:lnTo>
+                  <a:pt x="1168042" y="559218"/>
+                </a:lnTo>
+                <a:lnTo>
+                  <a:pt x="1196531" y="574452"/>
+                </a:lnTo>
+                <a:lnTo>
+                  <a:pt x="1225020" y="589291"/>
+                </a:lnTo>
+                <a:lnTo>
+                  <a:pt x="1253509" y="603744"/>
+                </a:lnTo>
+                <a:lnTo>
+                  <a:pt x="1281997" y="617819"/>
+                </a:lnTo>
+                <a:lnTo>
+                  <a:pt x="1310486" y="631525"/>
+                </a:lnTo>
+                <a:lnTo>
+                  <a:pt x="1338975" y="644870"/>
+                </a:lnTo>
+                <a:lnTo>
+                  <a:pt x="1367464" y="657863"/>
+                </a:lnTo>
+                <a:lnTo>
+                  <a:pt x="1395953" y="670514"/>
+                </a:lnTo>
+                <a:lnTo>
+                  <a:pt x="1424442" y="682832"/>
+                </a:lnTo>
+                <a:lnTo>
+                  <a:pt x="1452931" y="694825"/>
+                </a:lnTo>
+                <a:lnTo>
+                  <a:pt x="1481419" y="706503"/>
+                </a:lnTo>
+                <a:lnTo>
+                  <a:pt x="1509908" y="717874"/>
+                </a:lnTo>
+                <a:lnTo>
+                  <a:pt x="1538397" y="728947"/>
+                </a:lnTo>
+                <a:lnTo>
+                  <a:pt x="1566886" y="739731"/>
+                </a:lnTo>
+                <a:lnTo>
+                  <a:pt x="1595375" y="750234"/>
+                </a:lnTo>
+                <a:lnTo>
+                  <a:pt x="1623864" y="760464"/>
+                </a:lnTo>
+                <a:lnTo>
+                  <a:pt x="1652352" y="770430"/>
+                </a:lnTo>
+                <a:lnTo>
+                  <a:pt x="1680841" y="780139"/>
+                </a:lnTo>
+                <a:lnTo>
+                  <a:pt x="1709330" y="789599"/>
+                </a:lnTo>
+                <a:lnTo>
+                  <a:pt x="1737819" y="798817"/>
+                </a:lnTo>
+                <a:lnTo>
+                  <a:pt x="1766308" y="807800"/>
+                </a:lnTo>
+                <a:lnTo>
+                  <a:pt x="1794797" y="816557"/>
+                </a:lnTo>
+                <a:lnTo>
+                  <a:pt x="1823286" y="825092"/>
+                </a:lnTo>
+                <a:lnTo>
+                  <a:pt x="1851774" y="833414"/>
+                </a:lnTo>
+                <a:lnTo>
+                  <a:pt x="1880263" y="841528"/>
+                </a:lnTo>
+                <a:lnTo>
+                  <a:pt x="1908752" y="849440"/>
+                </a:lnTo>
+                <a:lnTo>
+                  <a:pt x="1937241" y="857158"/>
+                </a:lnTo>
+                <a:lnTo>
+                  <a:pt x="1965730" y="864686"/>
+                </a:lnTo>
+                <a:lnTo>
+                  <a:pt x="1994219" y="872030"/>
+                </a:lnTo>
+                <a:lnTo>
+                  <a:pt x="2022707" y="879196"/>
+                </a:lnTo>
+                <a:lnTo>
+                  <a:pt x="2051196" y="886189"/>
+                </a:lnTo>
+                <a:lnTo>
+                  <a:pt x="2079685" y="893015"/>
+                </a:lnTo>
+                <a:lnTo>
+                  <a:pt x="2108174" y="899677"/>
+                </a:lnTo>
+                <a:lnTo>
+                  <a:pt x="2136663" y="906182"/>
+                </a:lnTo>
+                <a:lnTo>
+                  <a:pt x="2165152" y="912533"/>
+                </a:lnTo>
+                <a:lnTo>
+                  <a:pt x="2193641" y="918736"/>
+                </a:lnTo>
+                <a:lnTo>
+                  <a:pt x="2222129" y="924794"/>
+                </a:lnTo>
+                <a:lnTo>
+                  <a:pt x="2250618" y="930711"/>
+                </a:lnTo>
+                <a:lnTo>
+                  <a:pt x="2279107" y="936493"/>
+                </a:lnTo>
+                <a:lnTo>
+                  <a:pt x="2307596" y="942142"/>
+                </a:lnTo>
+                <a:lnTo>
+                  <a:pt x="2336085" y="947663"/>
+                </a:lnTo>
+                <a:lnTo>
+                  <a:pt x="2364574" y="953059"/>
+                </a:lnTo>
+                <a:lnTo>
+                  <a:pt x="2393062" y="958334"/>
+                </a:lnTo>
+                <a:lnTo>
+                  <a:pt x="2421551" y="963491"/>
+                </a:lnTo>
+                <a:lnTo>
+                  <a:pt x="2450040" y="968533"/>
+                </a:lnTo>
+                <a:lnTo>
+                  <a:pt x="2478529" y="973465"/>
+                </a:lnTo>
+                <a:lnTo>
+                  <a:pt x="2507018" y="978288"/>
+                </a:lnTo>
+                <a:lnTo>
+                  <a:pt x="2535507" y="983006"/>
+                </a:lnTo>
+                <a:lnTo>
+                  <a:pt x="2563995" y="987622"/>
+                </a:lnTo>
+                <a:lnTo>
+                  <a:pt x="2592484" y="992139"/>
+                </a:lnTo>
+                <a:lnTo>
+                  <a:pt x="2620973" y="996559"/>
+                </a:lnTo>
+                <a:lnTo>
+                  <a:pt x="2649462" y="1000885"/>
+                </a:lnTo>
+                <a:lnTo>
+                  <a:pt x="2677951" y="1005120"/>
+                </a:lnTo>
+                <a:lnTo>
+                  <a:pt x="2706440" y="1009265"/>
+                </a:lnTo>
+                <a:lnTo>
+                  <a:pt x="2734929" y="1013325"/>
+                </a:lnTo>
+                <a:lnTo>
+                  <a:pt x="2763417" y="1017300"/>
+                </a:lnTo>
+                <a:lnTo>
+                  <a:pt x="2791906" y="1021193"/>
+                </a:lnTo>
+                <a:lnTo>
+                  <a:pt x="2820395" y="1025006"/>
+                </a:lnTo>
+                <a:lnTo>
+                  <a:pt x="2848884" y="1028741"/>
+                </a:lnTo>
+                <a:lnTo>
+                  <a:pt x="2877373" y="1032401"/>
+                </a:lnTo>
+                <a:lnTo>
+                  <a:pt x="2905862" y="1035987"/>
+                </a:lnTo>
+                <a:lnTo>
+                  <a:pt x="2934350" y="1039502"/>
+                </a:lnTo>
+                <a:lnTo>
+                  <a:pt x="2962839" y="1042946"/>
+                </a:lnTo>
+                <a:lnTo>
+                  <a:pt x="2991328" y="1046322"/>
+                </a:lnTo>
+                <a:lnTo>
+                  <a:pt x="3019817" y="1049632"/>
+                </a:lnTo>
+                <a:lnTo>
+                  <a:pt x="3048306" y="1052878"/>
+                </a:lnTo>
+                <a:lnTo>
+                  <a:pt x="3076795" y="1056060"/>
+                </a:lnTo>
+                <a:lnTo>
+                  <a:pt x="3105284" y="1059180"/>
+                </a:lnTo>
+                <a:lnTo>
+                  <a:pt x="3133772" y="1062241"/>
+                </a:lnTo>
+                <a:lnTo>
+                  <a:pt x="3162261" y="1065244"/>
+                </a:lnTo>
+                <a:lnTo>
+                  <a:pt x="3190750" y="1068189"/>
+                </a:lnTo>
+                <a:lnTo>
+                  <a:pt x="3219239" y="1071079"/>
+                </a:lnTo>
+                <a:lnTo>
+                  <a:pt x="3247728" y="1073914"/>
+                </a:lnTo>
+                <a:lnTo>
+                  <a:pt x="3276217" y="1076697"/>
+                </a:lnTo>
+                <a:lnTo>
+                  <a:pt x="3304705" y="1079428"/>
+                </a:lnTo>
+                <a:lnTo>
+                  <a:pt x="3333194" y="1082109"/>
+                </a:lnTo>
+                <a:lnTo>
+                  <a:pt x="3361683" y="1084740"/>
+                </a:lnTo>
+                <a:lnTo>
+                  <a:pt x="3390172" y="1087323"/>
+                </a:lnTo>
+                <a:lnTo>
+                  <a:pt x="3418661" y="1089860"/>
+                </a:lnTo>
+                <a:lnTo>
+                  <a:pt x="3447150" y="1092351"/>
+                </a:lnTo>
+                <a:lnTo>
+                  <a:pt x="3475638" y="1094797"/>
+                </a:lnTo>
+                <a:lnTo>
+                  <a:pt x="3504127" y="1097200"/>
+                </a:lnTo>
+                <a:lnTo>
+                  <a:pt x="3532616" y="1099560"/>
+                </a:lnTo>
+                <a:lnTo>
+                  <a:pt x="3561105" y="1101878"/>
+                </a:lnTo>
+                <a:lnTo>
+                  <a:pt x="3589594" y="1104156"/>
+                </a:lnTo>
+                <a:lnTo>
+                  <a:pt x="3618083" y="1106394"/>
+                </a:lnTo>
+                <a:lnTo>
+                  <a:pt x="3646572" y="1108593"/>
+                </a:lnTo>
+                <a:lnTo>
+                  <a:pt x="3675060" y="1110754"/>
+                </a:lnTo>
+                <a:lnTo>
+                  <a:pt x="3703549" y="1112878"/>
+                </a:lnTo>
+                <a:lnTo>
+                  <a:pt x="3732038" y="1114966"/>
+                </a:lnTo>
+                <a:lnTo>
+                  <a:pt x="3760527" y="1117018"/>
+                </a:lnTo>
+                <a:lnTo>
+                  <a:pt x="3789016" y="1119036"/>
+                </a:lnTo>
+                <a:lnTo>
+                  <a:pt x="3817505" y="1121020"/>
+                </a:lnTo>
+                <a:lnTo>
+                  <a:pt x="3845993" y="1122970"/>
+                </a:lnTo>
+                <a:lnTo>
+                  <a:pt x="3874482" y="1124889"/>
+                </a:lnTo>
+                <a:lnTo>
+                  <a:pt x="3902971" y="1126775"/>
+                </a:lnTo>
+                <a:lnTo>
+                  <a:pt x="3931460" y="1128631"/>
+                </a:lnTo>
+                <a:lnTo>
+                  <a:pt x="3959949" y="1130456"/>
+                </a:lnTo>
+                <a:lnTo>
+                  <a:pt x="3988438" y="1132251"/>
+                </a:lnTo>
+                <a:lnTo>
+                  <a:pt x="4016927" y="1134017"/>
+                </a:lnTo>
+                <a:lnTo>
+                  <a:pt x="4045415" y="1135755"/>
+                </a:lnTo>
+                <a:lnTo>
+                  <a:pt x="4073904" y="1137465"/>
+                </a:lnTo>
+                <a:lnTo>
+                  <a:pt x="4102393" y="1139148"/>
+                </a:lnTo>
+                <a:lnTo>
+                  <a:pt x="4130882" y="1140804"/>
+                </a:lnTo>
+                <a:lnTo>
+                  <a:pt x="4159371" y="1142434"/>
+                </a:lnTo>
+                <a:lnTo>
+                  <a:pt x="4187860" y="1144038"/>
+                </a:lnTo>
+                <a:lnTo>
+                  <a:pt x="4216348" y="1145617"/>
+                </a:lnTo>
+                <a:lnTo>
+                  <a:pt x="4244837" y="1147172"/>
+                </a:lnTo>
+                <a:lnTo>
+                  <a:pt x="4273326" y="1148702"/>
+                </a:lnTo>
+                <a:lnTo>
+                  <a:pt x="4301815" y="1150209"/>
+                </a:lnTo>
+                <a:lnTo>
+                  <a:pt x="4330304" y="1151693"/>
+                </a:lnTo>
+                <a:lnTo>
+                  <a:pt x="4358793" y="1153154"/>
+                </a:lnTo>
+                <a:lnTo>
+                  <a:pt x="4387282" y="1154593"/>
+                </a:lnTo>
+                <a:lnTo>
+                  <a:pt x="4415770" y="1156011"/>
+                </a:lnTo>
+                <a:lnTo>
+                  <a:pt x="4444259" y="1157407"/>
+                </a:lnTo>
+                <a:lnTo>
+                  <a:pt x="4472748" y="1158782"/>
+                </a:lnTo>
+                <a:lnTo>
+                  <a:pt x="4501237" y="1160136"/>
+                </a:lnTo>
+                <a:lnTo>
+                  <a:pt x="4529726" y="1161471"/>
+                </a:lnTo>
+                <a:lnTo>
+                  <a:pt x="4558215" y="1162786"/>
+                </a:lnTo>
+                <a:lnTo>
+                  <a:pt x="4586703" y="1164082"/>
+                </a:lnTo>
+                <a:lnTo>
+                  <a:pt x="4615192" y="1165358"/>
+                </a:lnTo>
+                <a:lnTo>
+                  <a:pt x="4643681" y="1166616"/>
+                </a:lnTo>
+                <a:lnTo>
+                  <a:pt x="4672170" y="1167856"/>
+                </a:lnTo>
+                <a:lnTo>
+                  <a:pt x="4700659" y="1169078"/>
+                </a:lnTo>
+                <a:lnTo>
+                  <a:pt x="4729148" y="1170283"/>
+                </a:lnTo>
+                <a:lnTo>
+                  <a:pt x="4757636" y="1171470"/>
+                </a:lnTo>
+                <a:lnTo>
+                  <a:pt x="4786125" y="1172641"/>
+                </a:lnTo>
+                <a:lnTo>
+                  <a:pt x="4814614" y="1173795"/>
+                </a:lnTo>
+                <a:lnTo>
+                  <a:pt x="4843103" y="1174933"/>
+                </a:lnTo>
+                <a:lnTo>
+                  <a:pt x="4871592" y="1176054"/>
+                </a:lnTo>
+                <a:lnTo>
+                  <a:pt x="4900081" y="1177161"/>
+                </a:lnTo>
+                <a:lnTo>
+                  <a:pt x="4928570" y="1178251"/>
+                </a:lnTo>
+                <a:lnTo>
+                  <a:pt x="4957058" y="1179327"/>
+                </a:lnTo>
+                <a:lnTo>
+                  <a:pt x="4985547" y="1180388"/>
+                </a:lnTo>
+                <a:lnTo>
+                  <a:pt x="5014036" y="1181434"/>
+                </a:lnTo>
+                <a:lnTo>
+                  <a:pt x="5042525" y="1182466"/>
+                </a:lnTo>
+                <a:lnTo>
+                  <a:pt x="5071014" y="1183484"/>
+                </a:lnTo>
+                <a:lnTo>
+                  <a:pt x="5099503" y="1184489"/>
+                </a:lnTo>
+                <a:lnTo>
+                  <a:pt x="5127991" y="1185480"/>
+                </a:lnTo>
+                <a:lnTo>
+                  <a:pt x="5156480" y="1186457"/>
+                </a:lnTo>
+                <a:lnTo>
+                  <a:pt x="5184969" y="1187422"/>
+                </a:lnTo>
+                <a:lnTo>
+                  <a:pt x="5213458" y="1188373"/>
+                </a:lnTo>
+                <a:lnTo>
+                  <a:pt x="5241947" y="1189312"/>
+                </a:lnTo>
+                <a:lnTo>
+                  <a:pt x="5270436" y="1190239"/>
+                </a:lnTo>
+                <a:lnTo>
+                  <a:pt x="5298925" y="1191154"/>
+                </a:lnTo>
+                <a:lnTo>
+                  <a:pt x="5327413" y="1192056"/>
+                </a:lnTo>
+                <a:lnTo>
+                  <a:pt x="5355902" y="1192947"/>
+                </a:lnTo>
+                <a:lnTo>
+                  <a:pt x="5384391" y="1193826"/>
+                </a:lnTo>
+                <a:lnTo>
+                  <a:pt x="5412880" y="1194694"/>
+                </a:lnTo>
+                <a:lnTo>
+                  <a:pt x="5441369" y="1195551"/>
+                </a:lnTo>
+                <a:lnTo>
+                  <a:pt x="5469858" y="1196397"/>
+                </a:lnTo>
+                <a:lnTo>
+                  <a:pt x="5498346" y="1197232"/>
+                </a:lnTo>
+                <a:lnTo>
+                  <a:pt x="5526835" y="1198057"/>
+                </a:lnTo>
+                <a:lnTo>
+                  <a:pt x="5555324" y="1198871"/>
+                </a:lnTo>
+                <a:lnTo>
+                  <a:pt x="5583813" y="1199675"/>
+                </a:lnTo>
+                <a:lnTo>
+                  <a:pt x="5612302" y="1200469"/>
+                </a:lnTo>
+                <a:lnTo>
+                  <a:pt x="5640791" y="1201253"/>
+                </a:lnTo>
+                <a:lnTo>
+                  <a:pt x="5669280" y="1202027"/>
+                </a:lnTo>
+                <a:lnTo>
+                  <a:pt x="5669280" y="1294385"/>
+                </a:lnTo>
+                <a:lnTo>
+                  <a:pt x="5640791" y="1294385"/>
+                </a:lnTo>
+                <a:lnTo>
+                  <a:pt x="5612302" y="1294385"/>
+                </a:lnTo>
+                <a:lnTo>
+                  <a:pt x="5583813" y="1294385"/>
+                </a:lnTo>
+                <a:lnTo>
+                  <a:pt x="5555324" y="1294385"/>
+                </a:lnTo>
+                <a:lnTo>
+                  <a:pt x="5526835" y="1294385"/>
+                </a:lnTo>
+                <a:lnTo>
+                  <a:pt x="5498346" y="1294385"/>
+                </a:lnTo>
+                <a:lnTo>
+                  <a:pt x="5469858" y="1294385"/>
+                </a:lnTo>
+                <a:lnTo>
+                  <a:pt x="5441369" y="1294385"/>
+                </a:lnTo>
+                <a:lnTo>
+                  <a:pt x="5412880" y="1294385"/>
+                </a:lnTo>
+                <a:lnTo>
+                  <a:pt x="5384391" y="1294385"/>
+                </a:lnTo>
+                <a:lnTo>
+                  <a:pt x="5355902" y="1294385"/>
+                </a:lnTo>
+                <a:lnTo>
+                  <a:pt x="5327413" y="1294385"/>
+                </a:lnTo>
+                <a:lnTo>
+                  <a:pt x="5298925" y="1294385"/>
+                </a:lnTo>
+                <a:lnTo>
+                  <a:pt x="5270436" y="1294385"/>
+                </a:lnTo>
+                <a:lnTo>
+                  <a:pt x="5241947" y="1294385"/>
+                </a:lnTo>
+                <a:lnTo>
+                  <a:pt x="5213458" y="1294385"/>
+                </a:lnTo>
+                <a:lnTo>
+                  <a:pt x="5184969" y="1294385"/>
+                </a:lnTo>
+                <a:lnTo>
+                  <a:pt x="5156480" y="1294385"/>
+                </a:lnTo>
+                <a:lnTo>
+                  <a:pt x="5127991" y="1294385"/>
+                </a:lnTo>
+                <a:lnTo>
+                  <a:pt x="5099503" y="1294385"/>
+                </a:lnTo>
+                <a:lnTo>
+                  <a:pt x="5071014" y="1294385"/>
+                </a:lnTo>
+                <a:lnTo>
+                  <a:pt x="5042525" y="1294385"/>
+                </a:lnTo>
+                <a:lnTo>
+                  <a:pt x="5014036" y="1294385"/>
+                </a:lnTo>
+                <a:lnTo>
+                  <a:pt x="4985547" y="1294385"/>
+                </a:lnTo>
+                <a:lnTo>
+                  <a:pt x="4957058" y="1294385"/>
+                </a:lnTo>
+                <a:lnTo>
+                  <a:pt x="4928570" y="1294385"/>
+                </a:lnTo>
+                <a:lnTo>
+                  <a:pt x="4900081" y="1294385"/>
+                </a:lnTo>
+                <a:lnTo>
+                  <a:pt x="4871592" y="1294385"/>
+                </a:lnTo>
+                <a:lnTo>
+                  <a:pt x="4843103" y="1294385"/>
+                </a:lnTo>
+                <a:lnTo>
+                  <a:pt x="4814614" y="1294385"/>
+                </a:lnTo>
+                <a:lnTo>
+                  <a:pt x="4786125" y="1294385"/>
+                </a:lnTo>
+                <a:lnTo>
+                  <a:pt x="4757636" y="1294385"/>
+                </a:lnTo>
+                <a:lnTo>
+                  <a:pt x="4729148" y="1294385"/>
+                </a:lnTo>
+                <a:lnTo>
+                  <a:pt x="4700659" y="1294385"/>
+                </a:lnTo>
+                <a:lnTo>
+                  <a:pt x="4672170" y="1294385"/>
+                </a:lnTo>
+                <a:lnTo>
+                  <a:pt x="4643681" y="1294385"/>
+                </a:lnTo>
+                <a:lnTo>
+                  <a:pt x="4615192" y="1294385"/>
+                </a:lnTo>
+                <a:lnTo>
+                  <a:pt x="4586703" y="1294385"/>
+                </a:lnTo>
+                <a:lnTo>
+                  <a:pt x="4558215" y="1294385"/>
+                </a:lnTo>
+                <a:lnTo>
+                  <a:pt x="4529726" y="1294385"/>
+                </a:lnTo>
+                <a:lnTo>
+                  <a:pt x="4501237" y="1294385"/>
+                </a:lnTo>
+                <a:lnTo>
+                  <a:pt x="4472748" y="1294385"/>
+                </a:lnTo>
+                <a:lnTo>
+                  <a:pt x="4444259" y="1294385"/>
+                </a:lnTo>
+                <a:lnTo>
+                  <a:pt x="4415770" y="1294385"/>
+                </a:lnTo>
+                <a:lnTo>
+                  <a:pt x="4387282" y="1294385"/>
+                </a:lnTo>
+                <a:lnTo>
+                  <a:pt x="4358793" y="1294385"/>
+                </a:lnTo>
+                <a:lnTo>
+                  <a:pt x="4330304" y="1294385"/>
+                </a:lnTo>
+                <a:lnTo>
+                  <a:pt x="4301815" y="1294385"/>
+                </a:lnTo>
+                <a:lnTo>
+                  <a:pt x="4273326" y="1294385"/>
+                </a:lnTo>
+                <a:lnTo>
+                  <a:pt x="4244837" y="1294385"/>
+                </a:lnTo>
+                <a:lnTo>
+                  <a:pt x="4216348" y="1294385"/>
+                </a:lnTo>
+                <a:lnTo>
+                  <a:pt x="4187860" y="1294385"/>
+                </a:lnTo>
+                <a:lnTo>
+                  <a:pt x="4159371" y="1294385"/>
+                </a:lnTo>
+                <a:lnTo>
+                  <a:pt x="4130882" y="1294385"/>
+                </a:lnTo>
+                <a:lnTo>
+                  <a:pt x="4102393" y="1294385"/>
+                </a:lnTo>
+                <a:lnTo>
+                  <a:pt x="4073904" y="1294385"/>
+                </a:lnTo>
+                <a:lnTo>
+                  <a:pt x="4045415" y="1294385"/>
+                </a:lnTo>
+                <a:lnTo>
+                  <a:pt x="4016927" y="1294385"/>
+                </a:lnTo>
+                <a:lnTo>
+                  <a:pt x="3988438" y="1294385"/>
+                </a:lnTo>
+                <a:lnTo>
+                  <a:pt x="3959949" y="1294385"/>
+                </a:lnTo>
+                <a:lnTo>
+                  <a:pt x="3931460" y="1294385"/>
+                </a:lnTo>
+                <a:lnTo>
+                  <a:pt x="3902971" y="1294385"/>
+                </a:lnTo>
+                <a:lnTo>
+                  <a:pt x="3874482" y="1294385"/>
+                </a:lnTo>
+                <a:lnTo>
+                  <a:pt x="3845993" y="1294385"/>
+                </a:lnTo>
+                <a:lnTo>
+                  <a:pt x="3817505" y="1294385"/>
+                </a:lnTo>
+                <a:lnTo>
+                  <a:pt x="3789016" y="1294385"/>
+                </a:lnTo>
+                <a:lnTo>
+                  <a:pt x="3760527" y="1294385"/>
+                </a:lnTo>
+                <a:lnTo>
+                  <a:pt x="3732038" y="1294385"/>
+                </a:lnTo>
+                <a:lnTo>
+                  <a:pt x="3703549" y="1294385"/>
+                </a:lnTo>
+                <a:lnTo>
+                  <a:pt x="3675060" y="1294385"/>
+                </a:lnTo>
+                <a:lnTo>
+                  <a:pt x="3646572" y="1294385"/>
+                </a:lnTo>
+                <a:lnTo>
+                  <a:pt x="3618083" y="1294385"/>
+                </a:lnTo>
+                <a:lnTo>
+                  <a:pt x="3589594" y="1294385"/>
+                </a:lnTo>
+                <a:lnTo>
+                  <a:pt x="3561105" y="1294385"/>
+                </a:lnTo>
+                <a:lnTo>
+                  <a:pt x="3532616" y="1294385"/>
+                </a:lnTo>
+                <a:lnTo>
+                  <a:pt x="3504127" y="1294385"/>
+                </a:lnTo>
+                <a:lnTo>
+                  <a:pt x="3475638" y="1294385"/>
+                </a:lnTo>
+                <a:lnTo>
+                  <a:pt x="3447150" y="1294385"/>
+                </a:lnTo>
+                <a:lnTo>
+                  <a:pt x="3418661" y="1294385"/>
+                </a:lnTo>
+                <a:lnTo>
+                  <a:pt x="3390172" y="1294385"/>
+                </a:lnTo>
+                <a:lnTo>
+                  <a:pt x="3361683" y="1294385"/>
+                </a:lnTo>
+                <a:lnTo>
+                  <a:pt x="3333194" y="1294385"/>
+                </a:lnTo>
+                <a:lnTo>
+                  <a:pt x="3304705" y="1294385"/>
+                </a:lnTo>
+                <a:lnTo>
+                  <a:pt x="3276217" y="1294385"/>
+                </a:lnTo>
+                <a:lnTo>
+                  <a:pt x="3247728" y="1294385"/>
+                </a:lnTo>
+                <a:lnTo>
+                  <a:pt x="3219239" y="1294385"/>
+                </a:lnTo>
+                <a:lnTo>
+                  <a:pt x="3190750" y="1294385"/>
+                </a:lnTo>
+                <a:lnTo>
+                  <a:pt x="3162261" y="1294385"/>
+                </a:lnTo>
+                <a:lnTo>
+                  <a:pt x="3133772" y="1294385"/>
+                </a:lnTo>
+                <a:lnTo>
+                  <a:pt x="3105284" y="1294385"/>
+                </a:lnTo>
+                <a:lnTo>
+                  <a:pt x="3076795" y="1294385"/>
+                </a:lnTo>
+                <a:lnTo>
+                  <a:pt x="3048306" y="1294385"/>
+                </a:lnTo>
+                <a:lnTo>
+                  <a:pt x="3019817" y="1294385"/>
+                </a:lnTo>
+                <a:lnTo>
+                  <a:pt x="2991328" y="1294385"/>
+                </a:lnTo>
+                <a:lnTo>
+                  <a:pt x="2962839" y="1294385"/>
+                </a:lnTo>
+                <a:lnTo>
+                  <a:pt x="2934350" y="1294385"/>
+                </a:lnTo>
+                <a:lnTo>
+                  <a:pt x="2905862" y="1294385"/>
+                </a:lnTo>
+                <a:lnTo>
+                  <a:pt x="2877373" y="1294385"/>
+                </a:lnTo>
+                <a:lnTo>
+                  <a:pt x="2848884" y="1294385"/>
+                </a:lnTo>
+                <a:lnTo>
+                  <a:pt x="2820395" y="1294385"/>
+                </a:lnTo>
+                <a:lnTo>
+                  <a:pt x="2791906" y="1294385"/>
+                </a:lnTo>
+                <a:lnTo>
+                  <a:pt x="2763417" y="1294385"/>
+                </a:lnTo>
+                <a:lnTo>
+                  <a:pt x="2734929" y="1294385"/>
+                </a:lnTo>
+                <a:lnTo>
+                  <a:pt x="2706440" y="1294385"/>
+                </a:lnTo>
+                <a:lnTo>
+                  <a:pt x="2677951" y="1294385"/>
+                </a:lnTo>
+                <a:lnTo>
+                  <a:pt x="2649462" y="1294385"/>
+                </a:lnTo>
+                <a:lnTo>
+                  <a:pt x="2620973" y="1294385"/>
+                </a:lnTo>
+                <a:lnTo>
+                  <a:pt x="2592484" y="1294385"/>
+                </a:lnTo>
+                <a:lnTo>
+                  <a:pt x="2563995" y="1294385"/>
+                </a:lnTo>
+                <a:lnTo>
+                  <a:pt x="2535507" y="1294385"/>
+                </a:lnTo>
+                <a:lnTo>
+                  <a:pt x="2507018" y="1294385"/>
+                </a:lnTo>
+                <a:lnTo>
+                  <a:pt x="2478529" y="1294385"/>
+                </a:lnTo>
+                <a:lnTo>
+                  <a:pt x="2450040" y="1294385"/>
+                </a:lnTo>
+                <a:lnTo>
+                  <a:pt x="2421551" y="1294385"/>
+                </a:lnTo>
+                <a:lnTo>
+                  <a:pt x="2393062" y="1294385"/>
+                </a:lnTo>
+                <a:lnTo>
+                  <a:pt x="2364574" y="1294385"/>
+                </a:lnTo>
+                <a:lnTo>
+                  <a:pt x="2336085" y="1294385"/>
+                </a:lnTo>
+                <a:lnTo>
+                  <a:pt x="2307596" y="1294385"/>
+                </a:lnTo>
+                <a:lnTo>
+                  <a:pt x="2279107" y="1294385"/>
+                </a:lnTo>
+                <a:lnTo>
+                  <a:pt x="2250618" y="1294385"/>
+                </a:lnTo>
+                <a:lnTo>
+                  <a:pt x="2222129" y="1294385"/>
+                </a:lnTo>
+                <a:lnTo>
+                  <a:pt x="2193641" y="1294385"/>
+                </a:lnTo>
+                <a:lnTo>
+                  <a:pt x="2165152" y="1294385"/>
+                </a:lnTo>
+                <a:lnTo>
+                  <a:pt x="2136663" y="1294385"/>
+                </a:lnTo>
+                <a:lnTo>
+                  <a:pt x="2108174" y="1294385"/>
+                </a:lnTo>
+                <a:lnTo>
+                  <a:pt x="2079685" y="1294385"/>
+                </a:lnTo>
+                <a:lnTo>
+                  <a:pt x="2051196" y="1294385"/>
+                </a:lnTo>
+                <a:lnTo>
+                  <a:pt x="2022707" y="1294385"/>
+                </a:lnTo>
+                <a:lnTo>
+                  <a:pt x="1994219" y="1294385"/>
+                </a:lnTo>
+                <a:lnTo>
+                  <a:pt x="1965730" y="1294385"/>
+                </a:lnTo>
+                <a:lnTo>
+                  <a:pt x="1937241" y="1294385"/>
+                </a:lnTo>
+                <a:lnTo>
+                  <a:pt x="1908752" y="1294385"/>
+                </a:lnTo>
+                <a:lnTo>
+                  <a:pt x="1880263" y="1294385"/>
+                </a:lnTo>
+                <a:lnTo>
+                  <a:pt x="1851774" y="1294385"/>
+                </a:lnTo>
+                <a:lnTo>
+                  <a:pt x="1823286" y="1294385"/>
+                </a:lnTo>
+                <a:lnTo>
+                  <a:pt x="1794797" y="1294385"/>
+                </a:lnTo>
+                <a:lnTo>
+                  <a:pt x="1766308" y="1294385"/>
+                </a:lnTo>
+                <a:lnTo>
+                  <a:pt x="1737819" y="1294385"/>
+                </a:lnTo>
+                <a:lnTo>
+                  <a:pt x="1709330" y="1294385"/>
+                </a:lnTo>
+                <a:lnTo>
+                  <a:pt x="1680841" y="1294385"/>
+                </a:lnTo>
+                <a:lnTo>
+                  <a:pt x="1652352" y="1294385"/>
+                </a:lnTo>
+                <a:lnTo>
+                  <a:pt x="1623864" y="1294385"/>
+                </a:lnTo>
+                <a:lnTo>
+                  <a:pt x="1595375" y="1294385"/>
+                </a:lnTo>
+                <a:lnTo>
+                  <a:pt x="1566886" y="1294385"/>
+                </a:lnTo>
+                <a:lnTo>
+                  <a:pt x="1538397" y="1294385"/>
+                </a:lnTo>
+                <a:lnTo>
+                  <a:pt x="1509908" y="1294385"/>
+                </a:lnTo>
+                <a:lnTo>
+                  <a:pt x="1481419" y="1294385"/>
+                </a:lnTo>
+                <a:lnTo>
+                  <a:pt x="1452931" y="1294385"/>
+                </a:lnTo>
+                <a:lnTo>
+                  <a:pt x="1424442" y="1294385"/>
+                </a:lnTo>
+                <a:lnTo>
+                  <a:pt x="1395953" y="1294385"/>
+                </a:lnTo>
+                <a:lnTo>
+                  <a:pt x="1367464" y="1294385"/>
+                </a:lnTo>
+                <a:lnTo>
+                  <a:pt x="1338975" y="1294385"/>
+                </a:lnTo>
+                <a:lnTo>
+                  <a:pt x="1310486" y="1294385"/>
+                </a:lnTo>
+                <a:lnTo>
+                  <a:pt x="1281997" y="1294385"/>
+                </a:lnTo>
+                <a:lnTo>
+                  <a:pt x="1253509" y="1294385"/>
+                </a:lnTo>
+                <a:lnTo>
+                  <a:pt x="1225020" y="1294385"/>
+                </a:lnTo>
+                <a:lnTo>
+                  <a:pt x="1196531" y="1294385"/>
+                </a:lnTo>
+                <a:lnTo>
+                  <a:pt x="1168042" y="1294385"/>
+                </a:lnTo>
+                <a:lnTo>
+                  <a:pt x="1139553" y="1294385"/>
+                </a:lnTo>
+                <a:lnTo>
+                  <a:pt x="1111064" y="1294385"/>
+                </a:lnTo>
+                <a:lnTo>
+                  <a:pt x="1082576" y="1294385"/>
+                </a:lnTo>
+                <a:lnTo>
+                  <a:pt x="1054087" y="1294385"/>
+                </a:lnTo>
+                <a:lnTo>
+                  <a:pt x="1025598" y="1294385"/>
+                </a:lnTo>
+                <a:lnTo>
+                  <a:pt x="997109" y="1294385"/>
+                </a:lnTo>
+                <a:lnTo>
+                  <a:pt x="968620" y="1294385"/>
+                </a:lnTo>
+                <a:lnTo>
+                  <a:pt x="940131" y="1294385"/>
+                </a:lnTo>
+                <a:lnTo>
+                  <a:pt x="911643" y="1294385"/>
+                </a:lnTo>
+                <a:lnTo>
+                  <a:pt x="883154" y="1294385"/>
+                </a:lnTo>
+                <a:lnTo>
+                  <a:pt x="854665" y="1294385"/>
+                </a:lnTo>
+                <a:lnTo>
+                  <a:pt x="826176" y="1294385"/>
+                </a:lnTo>
+                <a:lnTo>
+                  <a:pt x="797687" y="1294385"/>
+                </a:lnTo>
+                <a:lnTo>
+                  <a:pt x="769198" y="1294385"/>
+                </a:lnTo>
+                <a:lnTo>
+                  <a:pt x="740709" y="1294385"/>
+                </a:lnTo>
+                <a:lnTo>
+                  <a:pt x="712221" y="1294385"/>
+                </a:lnTo>
+                <a:lnTo>
+                  <a:pt x="683732" y="1294385"/>
+                </a:lnTo>
+                <a:lnTo>
+                  <a:pt x="655243" y="1294385"/>
+                </a:lnTo>
+                <a:lnTo>
+                  <a:pt x="626754" y="1294385"/>
+                </a:lnTo>
+                <a:lnTo>
+                  <a:pt x="598265" y="1294385"/>
+                </a:lnTo>
+                <a:lnTo>
+                  <a:pt x="569776" y="1294385"/>
+                </a:lnTo>
+                <a:lnTo>
+                  <a:pt x="541288" y="1294385"/>
+                </a:lnTo>
+                <a:lnTo>
+                  <a:pt x="512799" y="1294385"/>
+                </a:lnTo>
+                <a:lnTo>
+                  <a:pt x="484310" y="1294385"/>
+                </a:lnTo>
+                <a:lnTo>
+                  <a:pt x="455821" y="1294385"/>
+                </a:lnTo>
+                <a:lnTo>
+                  <a:pt x="427332" y="1294385"/>
+                </a:lnTo>
+                <a:lnTo>
+                  <a:pt x="398843" y="1294385"/>
+                </a:lnTo>
+                <a:lnTo>
+                  <a:pt x="370354" y="1294385"/>
+                </a:lnTo>
+                <a:lnTo>
+                  <a:pt x="341866" y="1294385"/>
+                </a:lnTo>
+                <a:lnTo>
+                  <a:pt x="313377" y="1294385"/>
+                </a:lnTo>
+                <a:lnTo>
+                  <a:pt x="284888" y="1294385"/>
+                </a:lnTo>
+                <a:lnTo>
+                  <a:pt x="256399" y="1294385"/>
+                </a:lnTo>
+                <a:lnTo>
+                  <a:pt x="227910" y="1294385"/>
+                </a:lnTo>
+                <a:lnTo>
+                  <a:pt x="199421" y="1294385"/>
+                </a:lnTo>
+                <a:lnTo>
+                  <a:pt x="170933" y="1294385"/>
+                </a:lnTo>
+                <a:lnTo>
+                  <a:pt x="142444" y="1294385"/>
+                </a:lnTo>
+                <a:lnTo>
+                  <a:pt x="113955" y="1294385"/>
+                </a:lnTo>
+                <a:lnTo>
+                  <a:pt x="85466" y="1294385"/>
+                </a:lnTo>
+                <a:lnTo>
+                  <a:pt x="56977" y="1294385"/>
+                </a:lnTo>
+                <a:lnTo>
+                  <a:pt x="28488" y="1294385"/>
+                </a:lnTo>
+                <a:lnTo>
+                  <a:pt x="0" y="1294385"/>
+                </a:lnTo>
+                <a:close/>
+              </a:path>
+            </a:pathLst>
+          </a:custGeom>
+          <a:solidFill>
+            <a:srgbClr val="8EDBD4">
+              <a:alpha val="22000"/>
+            </a:srgbClr>
+          </a:solidFill>
+          <a:ln w="10160">
+            <a:solidFill>
+              <a:srgbClr val="8EDBD4">
+                <a:alpha val="22000"/>
+              </a:srgbClr>
+            </a:solidFill>
+          </a:ln>
+          <a:effectLst/>
+        </p:spPr>
+        <p:txBody>
+          <a:bodyPr rtlCol="0" anchor="ctr"/>
+          <a:lstStyle/>
+          <a:p>
+            <a:pPr algn="ctr"/>
+          </a:p>
+        </p:txBody>
+      </p:sp>
+      <p:sp>
+        <p:nvSpPr>
+          <p:cNvPr id="36" name="A-E10 polygon 34" descr="sci-ppt:o034"/>
+          <p:cNvSpPr/>
+          <p:nvPr/>
+        </p:nvSpPr>
+        <p:spPr>
+          <a:xfrm>
+            <a:off x="914400" y="3734815"/>
+            <a:ext cx="5669280" cy="1202027"/>
+          </a:xfrm>
+          <a:custGeom>
+            <a:avLst/>
+            <a:gdLst/>
+            <a:ahLst/>
+            <a:cxnLst/>
+            <a:rect l="l" t="t" r="r" b="b"/>
+            <a:pathLst>
+              <a:path w="5669280" h="1202027">
+                <a:moveTo>
+                  <a:pt x="0" y="524363"/>
+                </a:moveTo>
+                <a:lnTo>
+                  <a:pt x="28488" y="386420"/>
+                </a:lnTo>
+                <a:lnTo>
+                  <a:pt x="56977" y="277996"/>
+                </a:lnTo>
+                <a:lnTo>
+                  <a:pt x="85466" y="193755"/>
+                </a:lnTo>
+                <a:lnTo>
+                  <a:pt x="113955" y="129357"/>
+                </a:lnTo>
+                <a:lnTo>
+                  <a:pt x="142444" y="81262"/>
+                </a:lnTo>
+                <a:lnTo>
+                  <a:pt x="170933" y="46568"/>
+                </a:lnTo>
+                <a:lnTo>
+                  <a:pt x="199421" y="22893"/>
+                </a:lnTo>
+                <a:lnTo>
+                  <a:pt x="227910" y="8273"/>
+                </a:lnTo>
+                <a:lnTo>
+                  <a:pt x="256399" y="1089"/>
+                </a:lnTo>
+                <a:lnTo>
+                  <a:pt x="284888" y="0"/>
+                </a:lnTo>
+                <a:lnTo>
+                  <a:pt x="313377" y="3893"/>
+                </a:lnTo>
+                <a:lnTo>
+                  <a:pt x="341866" y="11845"/>
+                </a:lnTo>
+                <a:lnTo>
+                  <a:pt x="370354" y="23088"/>
+                </a:lnTo>
+                <a:lnTo>
+                  <a:pt x="398843" y="36980"/>
+                </a:lnTo>
+                <a:lnTo>
+                  <a:pt x="427332" y="52989"/>
+                </a:lnTo>
+                <a:lnTo>
+                  <a:pt x="455821" y="70668"/>
+                </a:lnTo>
+                <a:lnTo>
+                  <a:pt x="484310" y="89648"/>
+                </a:lnTo>
+                <a:lnTo>
+                  <a:pt x="512799" y="109616"/>
+                </a:lnTo>
+                <a:lnTo>
+                  <a:pt x="541288" y="130314"/>
+                </a:lnTo>
+                <a:lnTo>
+                  <a:pt x="569776" y="151527"/>
+                </a:lnTo>
+                <a:lnTo>
+                  <a:pt x="598265" y="173074"/>
+                </a:lnTo>
+                <a:lnTo>
+                  <a:pt x="626754" y="194806"/>
+                </a:lnTo>
+                <a:lnTo>
+                  <a:pt x="655243" y="216599"/>
+                </a:lnTo>
+                <a:lnTo>
+                  <a:pt x="683732" y="238352"/>
+                </a:lnTo>
+                <a:lnTo>
+                  <a:pt x="712221" y="259978"/>
+                </a:lnTo>
+                <a:lnTo>
+                  <a:pt x="740709" y="281410"/>
+                </a:lnTo>
+                <a:lnTo>
+                  <a:pt x="769198" y="302591"/>
+                </a:lnTo>
+                <a:lnTo>
+                  <a:pt x="797687" y="323476"/>
+                </a:lnTo>
+                <a:lnTo>
+                  <a:pt x="826176" y="344028"/>
+                </a:lnTo>
+                <a:lnTo>
+                  <a:pt x="854665" y="364219"/>
+                </a:lnTo>
+                <a:lnTo>
+                  <a:pt x="883154" y="384027"/>
+                </a:lnTo>
+                <a:lnTo>
+                  <a:pt x="911643" y="403436"/>
+                </a:lnTo>
+                <a:lnTo>
+                  <a:pt x="940131" y="422434"/>
+                </a:lnTo>
+                <a:lnTo>
+                  <a:pt x="968620" y="441012"/>
+                </a:lnTo>
+                <a:lnTo>
+                  <a:pt x="997109" y="459167"/>
+                </a:lnTo>
+                <a:lnTo>
+                  <a:pt x="1025598" y="476895"/>
+                </a:lnTo>
+                <a:lnTo>
+                  <a:pt x="1054087" y="494198"/>
+                </a:lnTo>
+                <a:lnTo>
+                  <a:pt x="1082576" y="511077"/>
+                </a:lnTo>
+                <a:lnTo>
+                  <a:pt x="1111064" y="527537"/>
+                </a:lnTo>
+                <a:lnTo>
+                  <a:pt x="1139553" y="543582"/>
+                </a:lnTo>
+                <a:lnTo>
+                  <a:pt x="1168042" y="559218"/>
+                </a:lnTo>
+                <a:lnTo>
+                  <a:pt x="1196531" y="574452"/>
+                </a:lnTo>
+                <a:lnTo>
+                  <a:pt x="1225020" y="589291"/>
+                </a:lnTo>
+                <a:lnTo>
+                  <a:pt x="1253509" y="603744"/>
+                </a:lnTo>
+                <a:lnTo>
+                  <a:pt x="1281997" y="617819"/>
+                </a:lnTo>
+                <a:lnTo>
+                  <a:pt x="1310486" y="631525"/>
+                </a:lnTo>
+                <a:lnTo>
+                  <a:pt x="1338975" y="644870"/>
+                </a:lnTo>
+                <a:lnTo>
+                  <a:pt x="1367464" y="657863"/>
+                </a:lnTo>
+                <a:lnTo>
+                  <a:pt x="1395953" y="670514"/>
+                </a:lnTo>
+                <a:lnTo>
+                  <a:pt x="1424442" y="682832"/>
+                </a:lnTo>
+                <a:lnTo>
+                  <a:pt x="1452931" y="694825"/>
+                </a:lnTo>
+                <a:lnTo>
+                  <a:pt x="1481419" y="706503"/>
+                </a:lnTo>
+                <a:lnTo>
+                  <a:pt x="1509908" y="717874"/>
+                </a:lnTo>
+                <a:lnTo>
+                  <a:pt x="1538397" y="728947"/>
+                </a:lnTo>
+                <a:lnTo>
+                  <a:pt x="1566886" y="739731"/>
+                </a:lnTo>
+                <a:lnTo>
+                  <a:pt x="1595375" y="750234"/>
+                </a:lnTo>
+                <a:lnTo>
+                  <a:pt x="1623864" y="760464"/>
+                </a:lnTo>
+                <a:lnTo>
+                  <a:pt x="1652352" y="770430"/>
+                </a:lnTo>
+                <a:lnTo>
+                  <a:pt x="1680841" y="780139"/>
+                </a:lnTo>
+                <a:lnTo>
+                  <a:pt x="1709330" y="789599"/>
+                </a:lnTo>
+                <a:lnTo>
+                  <a:pt x="1737819" y="798817"/>
+                </a:lnTo>
+                <a:lnTo>
+                  <a:pt x="1766308" y="807800"/>
+                </a:lnTo>
+                <a:lnTo>
+                  <a:pt x="1794797" y="816557"/>
+                </a:lnTo>
+                <a:lnTo>
+                  <a:pt x="1823286" y="825092"/>
+                </a:lnTo>
+                <a:lnTo>
+                  <a:pt x="1851774" y="833414"/>
+                </a:lnTo>
+                <a:lnTo>
+                  <a:pt x="1880263" y="841528"/>
+                </a:lnTo>
+                <a:lnTo>
+                  <a:pt x="1908752" y="849440"/>
+                </a:lnTo>
+                <a:lnTo>
+                  <a:pt x="1937241" y="857158"/>
+                </a:lnTo>
+                <a:lnTo>
+                  <a:pt x="1965730" y="864686"/>
+                </a:lnTo>
+                <a:lnTo>
+                  <a:pt x="1994219" y="872030"/>
+                </a:lnTo>
+                <a:lnTo>
+                  <a:pt x="2022707" y="879196"/>
+                </a:lnTo>
+                <a:lnTo>
+                  <a:pt x="2051196" y="886189"/>
+                </a:lnTo>
+                <a:lnTo>
+                  <a:pt x="2079685" y="893015"/>
+                </a:lnTo>
+                <a:lnTo>
+                  <a:pt x="2108174" y="899677"/>
+                </a:lnTo>
+                <a:lnTo>
+                  <a:pt x="2136663" y="906182"/>
+                </a:lnTo>
+                <a:lnTo>
+                  <a:pt x="2165152" y="912533"/>
+                </a:lnTo>
+                <a:lnTo>
+                  <a:pt x="2193641" y="918736"/>
+                </a:lnTo>
+                <a:lnTo>
+                  <a:pt x="2222129" y="924794"/>
+                </a:lnTo>
+                <a:lnTo>
+                  <a:pt x="2250618" y="930711"/>
+                </a:lnTo>
+                <a:lnTo>
+                  <a:pt x="2279107" y="936493"/>
+                </a:lnTo>
+                <a:lnTo>
+                  <a:pt x="2307596" y="942142"/>
+                </a:lnTo>
+                <a:lnTo>
+                  <a:pt x="2336085" y="947663"/>
+                </a:lnTo>
+                <a:lnTo>
+                  <a:pt x="2364574" y="953059"/>
+                </a:lnTo>
+                <a:lnTo>
+                  <a:pt x="2393062" y="958334"/>
+                </a:lnTo>
+                <a:lnTo>
+                  <a:pt x="2421551" y="963491"/>
+                </a:lnTo>
+                <a:lnTo>
+                  <a:pt x="2450040" y="968533"/>
+                </a:lnTo>
+                <a:lnTo>
+                  <a:pt x="2478529" y="973465"/>
+                </a:lnTo>
+                <a:lnTo>
+                  <a:pt x="2507018" y="978288"/>
+                </a:lnTo>
+                <a:lnTo>
+                  <a:pt x="2535507" y="983006"/>
+                </a:lnTo>
+                <a:lnTo>
+                  <a:pt x="2563995" y="987622"/>
+                </a:lnTo>
+                <a:lnTo>
+                  <a:pt x="2592484" y="992139"/>
+                </a:lnTo>
+                <a:lnTo>
+                  <a:pt x="2620973" y="996559"/>
+                </a:lnTo>
+                <a:lnTo>
+                  <a:pt x="2649462" y="1000885"/>
+                </a:lnTo>
+                <a:lnTo>
+                  <a:pt x="2677951" y="1005120"/>
+                </a:lnTo>
+                <a:lnTo>
+                  <a:pt x="2706440" y="1009265"/>
+                </a:lnTo>
+                <a:lnTo>
+                  <a:pt x="2734929" y="1013325"/>
+                </a:lnTo>
+                <a:lnTo>
+                  <a:pt x="2763417" y="1017300"/>
+                </a:lnTo>
+                <a:lnTo>
+                  <a:pt x="2791906" y="1021193"/>
+                </a:lnTo>
+                <a:lnTo>
+                  <a:pt x="2820395" y="1025006"/>
+                </a:lnTo>
+                <a:lnTo>
+                  <a:pt x="2848884" y="1028741"/>
+                </a:lnTo>
+                <a:lnTo>
+                  <a:pt x="2877373" y="1032401"/>
+                </a:lnTo>
+                <a:lnTo>
+                  <a:pt x="2905862" y="1035987"/>
+                </a:lnTo>
+                <a:lnTo>
+                  <a:pt x="2934350" y="1039502"/>
+                </a:lnTo>
+                <a:lnTo>
+                  <a:pt x="2962839" y="1042946"/>
+                </a:lnTo>
+                <a:lnTo>
+                  <a:pt x="2991328" y="1046322"/>
+                </a:lnTo>
+                <a:lnTo>
+                  <a:pt x="3019817" y="1049632"/>
+                </a:lnTo>
+                <a:lnTo>
+                  <a:pt x="3048306" y="1052878"/>
+                </a:lnTo>
+                <a:lnTo>
+                  <a:pt x="3076795" y="1056060"/>
+                </a:lnTo>
+                <a:lnTo>
+                  <a:pt x="3105284" y="1059180"/>
+                </a:lnTo>
+                <a:lnTo>
+                  <a:pt x="3133772" y="1062241"/>
+                </a:lnTo>
+                <a:lnTo>
+                  <a:pt x="3162261" y="1065244"/>
+                </a:lnTo>
+                <a:lnTo>
+                  <a:pt x="3190750" y="1068189"/>
+                </a:lnTo>
+                <a:lnTo>
+                  <a:pt x="3219239" y="1071079"/>
+                </a:lnTo>
+                <a:lnTo>
+                  <a:pt x="3247728" y="1073914"/>
+                </a:lnTo>
+                <a:lnTo>
+                  <a:pt x="3276217" y="1076697"/>
+                </a:lnTo>
+                <a:lnTo>
+                  <a:pt x="3304705" y="1079428"/>
+                </a:lnTo>
+                <a:lnTo>
+                  <a:pt x="3333194" y="1082109"/>
+                </a:lnTo>
+                <a:lnTo>
+                  <a:pt x="3361683" y="1084740"/>
+                </a:lnTo>
+                <a:lnTo>
+                  <a:pt x="3390172" y="1087323"/>
+                </a:lnTo>
+                <a:lnTo>
+                  <a:pt x="3418661" y="1089860"/>
+                </a:lnTo>
+                <a:lnTo>
+                  <a:pt x="3447150" y="1092351"/>
+                </a:lnTo>
+                <a:lnTo>
+                  <a:pt x="3475638" y="1094797"/>
+                </a:lnTo>
+                <a:lnTo>
+                  <a:pt x="3504127" y="1097200"/>
+                </a:lnTo>
+                <a:lnTo>
+                  <a:pt x="3532616" y="1099560"/>
+                </a:lnTo>
+                <a:lnTo>
+                  <a:pt x="3561105" y="1101878"/>
+                </a:lnTo>
+                <a:lnTo>
+                  <a:pt x="3589594" y="1104156"/>
+                </a:lnTo>
+                <a:lnTo>
+                  <a:pt x="3618083" y="1106394"/>
+                </a:lnTo>
+                <a:lnTo>
+                  <a:pt x="3646572" y="1108593"/>
+                </a:lnTo>
+                <a:lnTo>
+                  <a:pt x="3675060" y="1110754"/>
+                </a:lnTo>
+                <a:lnTo>
+                  <a:pt x="3703549" y="1112878"/>
+                </a:lnTo>
+                <a:lnTo>
+                  <a:pt x="3732038" y="1114966"/>
+                </a:lnTo>
+                <a:lnTo>
+                  <a:pt x="3760527" y="1117018"/>
+                </a:lnTo>
+                <a:lnTo>
+                  <a:pt x="3789016" y="1119036"/>
+                </a:lnTo>
+                <a:lnTo>
+                  <a:pt x="3817505" y="1121020"/>
+                </a:lnTo>
+                <a:lnTo>
+                  <a:pt x="3845993" y="1122970"/>
+                </a:lnTo>
+                <a:lnTo>
+                  <a:pt x="3874482" y="1124889"/>
+                </a:lnTo>
+                <a:lnTo>
+                  <a:pt x="3902971" y="1126775"/>
+                </a:lnTo>
+                <a:lnTo>
+                  <a:pt x="3931460" y="1128631"/>
+                </a:lnTo>
+                <a:lnTo>
+                  <a:pt x="3959949" y="1130456"/>
+                </a:lnTo>
+                <a:lnTo>
+                  <a:pt x="3988438" y="1132251"/>
+                </a:lnTo>
+                <a:lnTo>
+                  <a:pt x="4016927" y="1134017"/>
+                </a:lnTo>
+                <a:lnTo>
+                  <a:pt x="4045415" y="1135755"/>
+                </a:lnTo>
+                <a:lnTo>
+                  <a:pt x="4073904" y="1137465"/>
+                </a:lnTo>
+                <a:lnTo>
+                  <a:pt x="4102393" y="1139148"/>
+                </a:lnTo>
+                <a:lnTo>
+                  <a:pt x="4130882" y="1140804"/>
+                </a:lnTo>
+                <a:lnTo>
+                  <a:pt x="4159371" y="1142434"/>
+                </a:lnTo>
+                <a:lnTo>
+                  <a:pt x="4187860" y="1144038"/>
+                </a:lnTo>
+                <a:lnTo>
+                  <a:pt x="4216348" y="1145617"/>
+                </a:lnTo>
+                <a:lnTo>
+                  <a:pt x="4244837" y="1147172"/>
+                </a:lnTo>
+                <a:lnTo>
+                  <a:pt x="4273326" y="1148702"/>
+                </a:lnTo>
+                <a:lnTo>
+                  <a:pt x="4301815" y="1150209"/>
+                </a:lnTo>
+                <a:lnTo>
+                  <a:pt x="4330304" y="1151693"/>
+                </a:lnTo>
+                <a:lnTo>
+                  <a:pt x="4358793" y="1153154"/>
+                </a:lnTo>
+                <a:lnTo>
+                  <a:pt x="4387282" y="1154593"/>
+                </a:lnTo>
+                <a:lnTo>
+                  <a:pt x="4415770" y="1156011"/>
+                </a:lnTo>
+                <a:lnTo>
+                  <a:pt x="4444259" y="1157407"/>
+                </a:lnTo>
+                <a:lnTo>
+                  <a:pt x="4472748" y="1158782"/>
+                </a:lnTo>
+                <a:lnTo>
+                  <a:pt x="4501237" y="1160136"/>
+                </a:lnTo>
+                <a:lnTo>
+                  <a:pt x="4529726" y="1161471"/>
+                </a:lnTo>
+                <a:lnTo>
+                  <a:pt x="4558215" y="1162786"/>
+                </a:lnTo>
+                <a:lnTo>
+                  <a:pt x="4586703" y="1164082"/>
+                </a:lnTo>
+                <a:lnTo>
+                  <a:pt x="4615192" y="1165358"/>
+                </a:lnTo>
+                <a:lnTo>
+                  <a:pt x="4643681" y="1166616"/>
+                </a:lnTo>
+                <a:lnTo>
+                  <a:pt x="4672170" y="1167856"/>
+                </a:lnTo>
+                <a:lnTo>
+                  <a:pt x="4700659" y="1169078"/>
+                </a:lnTo>
+                <a:lnTo>
+                  <a:pt x="4729148" y="1170283"/>
+                </a:lnTo>
+                <a:lnTo>
+                  <a:pt x="4757636" y="1171470"/>
+                </a:lnTo>
+                <a:lnTo>
+                  <a:pt x="4786125" y="1172641"/>
+                </a:lnTo>
+                <a:lnTo>
+                  <a:pt x="4814614" y="1173795"/>
+                </a:lnTo>
+                <a:lnTo>
+                  <a:pt x="4843103" y="1174933"/>
+                </a:lnTo>
+                <a:lnTo>
+                  <a:pt x="4871592" y="1176054"/>
+                </a:lnTo>
+                <a:lnTo>
+                  <a:pt x="4900081" y="1177161"/>
+                </a:lnTo>
+                <a:lnTo>
+                  <a:pt x="4928570" y="1178251"/>
+                </a:lnTo>
+                <a:lnTo>
+                  <a:pt x="4957058" y="1179327"/>
+                </a:lnTo>
+                <a:lnTo>
+                  <a:pt x="4985547" y="1180388"/>
+                </a:lnTo>
+                <a:lnTo>
+                  <a:pt x="5014036" y="1181434"/>
+                </a:lnTo>
+                <a:lnTo>
+                  <a:pt x="5042525" y="1182466"/>
+                </a:lnTo>
+                <a:lnTo>
+                  <a:pt x="5071014" y="1183484"/>
+                </a:lnTo>
+                <a:lnTo>
+                  <a:pt x="5099503" y="1184489"/>
+                </a:lnTo>
+                <a:lnTo>
+                  <a:pt x="5127991" y="1185480"/>
+                </a:lnTo>
+                <a:lnTo>
+                  <a:pt x="5156480" y="1186457"/>
+                </a:lnTo>
+                <a:lnTo>
+                  <a:pt x="5184969" y="1187422"/>
+                </a:lnTo>
+                <a:lnTo>
+                  <a:pt x="5213458" y="1188373"/>
+                </a:lnTo>
+                <a:lnTo>
+                  <a:pt x="5241947" y="1189312"/>
+                </a:lnTo>
+                <a:lnTo>
+                  <a:pt x="5270436" y="1190239"/>
+                </a:lnTo>
+                <a:lnTo>
+                  <a:pt x="5298925" y="1191154"/>
+                </a:lnTo>
+                <a:lnTo>
+                  <a:pt x="5327413" y="1192056"/>
+                </a:lnTo>
+                <a:lnTo>
+                  <a:pt x="5355902" y="1192947"/>
+                </a:lnTo>
+                <a:lnTo>
+                  <a:pt x="5384391" y="1193826"/>
+                </a:lnTo>
+                <a:lnTo>
+                  <a:pt x="5412880" y="1194694"/>
+                </a:lnTo>
+                <a:lnTo>
+                  <a:pt x="5441369" y="1195551"/>
+                </a:lnTo>
+                <a:lnTo>
+                  <a:pt x="5469858" y="1196397"/>
+                </a:lnTo>
+                <a:lnTo>
+                  <a:pt x="5498346" y="1197232"/>
+                </a:lnTo>
+                <a:lnTo>
+                  <a:pt x="5526835" y="1198057"/>
+                </a:lnTo>
+                <a:lnTo>
+                  <a:pt x="5555324" y="1198871"/>
+                </a:lnTo>
+                <a:lnTo>
+                  <a:pt x="5583813" y="1199675"/>
+                </a:lnTo>
+                <a:lnTo>
+                  <a:pt x="5612302" y="1200469"/>
+                </a:lnTo>
+                <a:lnTo>
+                  <a:pt x="5640791" y="1201253"/>
+                </a:lnTo>
+                <a:lnTo>
+                  <a:pt x="5669280" y="1202027"/>
+                </a:lnTo>
+              </a:path>
+            </a:pathLst>
+          </a:custGeom>
+          <a:noFill/>
+          <a:ln w="40640">
+            <a:solidFill>
+              <a:srgbClr val="8EDBD4"/>
+            </a:solidFill>
+          </a:ln>
+          <a:effectLst/>
+        </p:spPr>
+        <p:txBody>
+          <a:bodyPr rtlCol="0" anchor="ctr"/>
+          <a:lstStyle/>
+          <a:p>
+            <a:pPr algn="ctr"/>
+          </a:p>
+        </p:txBody>
+      </p:sp>
+      <p:sp>
+        <p:nvSpPr>
+          <p:cNvPr id="37" name="A-E10 text 35" descr="sci-ppt:o035"/>
+          <p:cNvSpPr txBox="1"/>
+          <p:nvPr/>
+        </p:nvSpPr>
+        <p:spPr>
+          <a:xfrm>
+            <a:off x="2461564" y="2411128"/>
+            <a:ext cx="3474720" cy="223900"/>
+          </a:xfrm>
+          <a:prstGeom prst="rect">
+            <a:avLst/>
+          </a:prstGeom>
+          <a:noFill/>
+          <a:effectLst/>
+        </p:spPr>
+        <p:txBody>
+          <a:bodyPr wrap="none" lIns="18288" rIns="18288" tIns="18288" bIns="18288" anchor="t">
+            <a:spAutoFit/>
+          </a:bodyPr>
+          <a:lstStyle/>
+          <a:p>
+            <a:pPr algn="l">
+              <a:spcAft>
+                <a:spcPts val="0"/>
+              </a:spcAft>
+            </a:pPr>
+            <a:r>
+              <a:rPr sz="1150" b="0" i="0">
+                <a:solidFill>
+                  <a:srgbClr val="F2B880"/>
+                </a:solidFill>
+                <a:latin typeface="Arial"/>
+              </a:rPr>
+              <a:t>∫_R^∞ aᵣ dr = 210.0000 m²/s²</a:t>
+            </a:r>
+          </a:p>
+        </p:txBody>
+      </p:sp>
+      <p:sp>
+        <p:nvSpPr>
+          <p:cNvPr id="38" name="A-E10 text 36" descr="sci-ppt:o036"/>
+          <p:cNvSpPr txBox="1"/>
+          <p:nvPr/>
+        </p:nvSpPr>
+        <p:spPr>
+          <a:xfrm>
+            <a:off x="2461564" y="2796138"/>
+            <a:ext cx="3474720" cy="223900"/>
+          </a:xfrm>
+          <a:prstGeom prst="rect">
+            <a:avLst/>
+          </a:prstGeom>
+          <a:noFill/>
+          <a:effectLst/>
+        </p:spPr>
+        <p:txBody>
+          <a:bodyPr wrap="none" lIns="18288" rIns="18288" tIns="18288" bIns="18288" anchor="t">
+            <a:spAutoFit/>
+          </a:bodyPr>
+          <a:lstStyle/>
+          <a:p>
+            <a:pPr algn="l">
+              <a:spcAft>
+                <a:spcPts val="0"/>
+              </a:spcAft>
+            </a:pPr>
+            <a:r>
+              <a:rPr sz="1150" b="0" i="0">
+                <a:solidFill>
+                  <a:srgbClr val="E7F0F3"/>
+                </a:solidFill>
+                <a:latin typeface="Arial"/>
+              </a:rPr>
+              <a:t>R R̈ + (3/2) Ṙ² = 210.0000 m²/s²</a:t>
+            </a:r>
+          </a:p>
+        </p:txBody>
+      </p:sp>
+      <p:sp>
+        <p:nvSpPr>
+          <p:cNvPr id="39" name="A-E10 round_rect 37" descr="sci-ppt:o037"/>
+          <p:cNvSpPr/>
+          <p:nvPr/>
+        </p:nvSpPr>
+        <p:spPr>
+          <a:xfrm>
+            <a:off x="6858000" y="1371600"/>
+            <a:ext cx="4983480" cy="3657600"/>
+          </a:xfrm>
+          <a:prstGeom prst="roundRect">
             <a:avLst/>
           </a:prstGeom>
           <a:solidFill>
             <a:srgbClr val="213E4B"/>
           </a:solidFill>
-          <a:ln w="17780">
+          <a:ln w="20320">
             <a:solidFill>
-              <a:srgbClr val="B4C7D2"/>
+              <a:srgbClr val="8EDBD4"/>
             </a:solidFill>
           </a:ln>
           <a:effectLst/>
@@ -3198,40 +6033,16 @@
           </a:p>
         </p:txBody>
       </p:sp>
-      <p:cxnSp>
-        <p:nvCxnSpPr>
-          <p:cNvPr id="5" name="arrow 3" descr="sci-ppt:obj-003"/>
-          <p:cNvCxnSpPr/>
-          <p:nvPr/>
-        </p:nvCxnSpPr>
-        <p:spPr>
-          <a:xfrm>
-            <a:off x="1792224" y="1645920"/>
-            <a:ext cx="329184" cy="0"/>
-          </a:xfrm>
-          <a:prstGeom prst="line">
-            <a:avLst/>
-          </a:prstGeom>
-          <a:ln w="21590">
-            <a:solidFill>
-              <a:srgbClr val="8EDBD4"/>
-            </a:solidFill>
-            <a:headEnd type="none" w="med" len="med"/>
-            <a:tailEnd type="triangle" w="med" len="med"/>
-          </a:ln>
-          <a:effectLst/>
-        </p:spPr>
-      </p:cxnSp>
-      <p:sp>
-        <p:nvSpPr>
-          <p:cNvPr id="6" name="text 4" descr="sci-ppt:obj-004"/>
+      <p:sp>
+        <p:nvSpPr>
+          <p:cNvPr id="40" name="A-E10 text 38" descr="sci-ppt:o038"/>
           <p:cNvSpPr txBox="1"/>
           <p:nvPr/>
         </p:nvSpPr>
         <p:spPr>
           <a:xfrm>
-            <a:off x="1755648" y="1271016"/>
-            <a:ext cx="1097280" cy="310896"/>
+            <a:off x="6967728" y="1426464"/>
+            <a:ext cx="4764024" cy="254889"/>
           </a:xfrm>
           <a:prstGeom prst="rect">
             <a:avLst/>
@@ -3240,7 +6051,7 @@
           <a:effectLst/>
         </p:spPr>
         <p:txBody>
-          <a:bodyPr wrap="none" lIns="0" rIns="0" tIns="0" bIns="0" anchor="ctr">
+          <a:bodyPr wrap="none" lIns="18288" rIns="18288" tIns="18288" bIns="18288" anchor="t">
             <a:spAutoFit/>
           </a:bodyPr>
           <a:lstStyle/>
@@ -3251,51 +6062,67 @@
               </a:spcAft>
             </a:pPr>
             <a:r>
-              <a:rPr sz="1296" b="0" i="0">
+              <a:rPr sz="1350" b="1" i="0">
+                <a:solidFill>
+                  <a:srgbClr val="8EDBD4"/>
+                </a:solidFill>
+                <a:latin typeface="Arial"/>
+              </a:rPr>
+              <a:t>Integrating the momentum law</a:t>
+            </a:r>
+          </a:p>
+        </p:txBody>
+      </p:sp>
+      <p:sp>
+        <p:nvSpPr>
+          <p:cNvPr id="41" name="A-E10 text 39" descr="sci-ppt:o039"/>
+          <p:cNvSpPr txBox="1"/>
+          <p:nvPr/>
+        </p:nvSpPr>
+        <p:spPr>
+          <a:xfrm>
+            <a:off x="6995160" y="1828800"/>
+            <a:ext cx="4754880" cy="231648"/>
+          </a:xfrm>
+          <a:prstGeom prst="rect">
+            <a:avLst/>
+          </a:prstGeom>
+          <a:noFill/>
+          <a:effectLst/>
+        </p:spPr>
+        <p:txBody>
+          <a:bodyPr wrap="none" lIns="18288" rIns="18288" tIns="18288" bIns="18288" anchor="t">
+            <a:spAutoFit/>
+          </a:bodyPr>
+          <a:lstStyle/>
+          <a:p>
+            <a:pPr algn="l">
+              <a:spcAft>
+                <a:spcPts val="0"/>
+              </a:spcAft>
+            </a:pPr>
+            <a:r>
+              <a:rPr sz="1200" b="1" i="0">
                 <a:solidFill>
                   <a:srgbClr val="E7F0F3"/>
                 </a:solidFill>
                 <a:latin typeface="Arial"/>
               </a:rPr>
-              <a:t>Rref</a:t>
-            </a:r>
-          </a:p>
-        </p:txBody>
-      </p:sp>
-      <p:cxnSp>
-        <p:nvCxnSpPr>
-          <p:cNvPr id="7" name="arrow 5" descr="sci-ppt:obj-005"/>
-          <p:cNvCxnSpPr/>
-          <p:nvPr/>
-        </p:nvCxnSpPr>
-        <p:spPr>
-          <a:xfrm>
-            <a:off x="1792224" y="1645920"/>
-            <a:ext cx="517262" cy="517262"/>
-          </a:xfrm>
-          <a:prstGeom prst="line">
-            <a:avLst/>
-          </a:prstGeom>
-          <a:ln w="21590">
-            <a:solidFill>
-              <a:srgbClr val="8EDBD4"/>
-            </a:solidFill>
-            <a:headEnd type="none" w="med" len="med"/>
-            <a:tailEnd type="triangle" w="med" len="med"/>
-          </a:ln>
-          <a:effectLst/>
-        </p:spPr>
-      </p:cxnSp>
-      <p:sp>
-        <p:nvSpPr>
-          <p:cNvPr id="8" name="text 6" descr="sci-ppt:obj-006"/>
+              <a:t>ρ_g aᵣ = ∂Tᵣᵣ/∂r + (2/r)(Tᵣᵣ − T_θθ)</a:t>
+            </a:r>
+          </a:p>
+        </p:txBody>
+      </p:sp>
+      <p:sp>
+        <p:nvSpPr>
+          <p:cNvPr id="42" name="A-E10 text 40" descr="sci-ppt:o040"/>
           <p:cNvSpPr txBox="1"/>
           <p:nvPr/>
         </p:nvSpPr>
         <p:spPr>
           <a:xfrm>
-            <a:off x="2304288" y="2139696"/>
-            <a:ext cx="822960" cy="310896"/>
+            <a:off x="6995160" y="2331720"/>
+            <a:ext cx="4754880" cy="239395"/>
           </a:xfrm>
           <a:prstGeom prst="rect">
             <a:avLst/>
@@ -3304,7 +6131,7 @@
           <a:effectLst/>
         </p:spPr>
         <p:txBody>
-          <a:bodyPr wrap="none" lIns="0" rIns="0" tIns="0" bIns="0" anchor="ctr">
+          <a:bodyPr wrap="none" lIns="18288" rIns="18288" tIns="18288" bIns="18288" anchor="t">
             <a:spAutoFit/>
           </a:bodyPr>
           <a:lstStyle/>
@@ -3315,113 +6142,163 @@
               </a:spcAft>
             </a:pPr>
             <a:r>
-              <a:rPr sz="1296" b="0" i="0">
+              <a:rPr sz="1250" b="1" i="0">
+                <a:solidFill>
+                  <a:srgbClr val="F2B880"/>
+                </a:solidFill>
+                <a:latin typeface="Arial"/>
+              </a:rPr>
+              <a:t>ρ_g ∫aᵣ dr = ρ_g (R R̈ + 3Ṙ²/2)</a:t>
+            </a:r>
+          </a:p>
+        </p:txBody>
+      </p:sp>
+      <p:sp>
+        <p:nvSpPr>
+          <p:cNvPr id="43" name="A-E10 text 41" descr="sci-ppt:o041"/>
+          <p:cNvSpPr txBox="1"/>
+          <p:nvPr/>
+        </p:nvSpPr>
+        <p:spPr>
+          <a:xfrm>
+            <a:off x="6995160" y="2834640"/>
+            <a:ext cx="4754880" cy="223900"/>
+          </a:xfrm>
+          <a:prstGeom prst="rect">
+            <a:avLst/>
+          </a:prstGeom>
+          <a:noFill/>
+          <a:effectLst/>
+        </p:spPr>
+        <p:txBody>
+          <a:bodyPr wrap="none" lIns="18288" rIns="18288" tIns="18288" bIns="18288" anchor="t">
+            <a:spAutoFit/>
+          </a:bodyPr>
+          <a:lstStyle/>
+          <a:p>
+            <a:pPr algn="l">
+              <a:spcAft>
+                <a:spcPts val="0"/>
+              </a:spcAft>
+            </a:pPr>
+            <a:r>
+              <a:rPr sz="1150" b="1" i="0">
+                <a:solidFill>
+                  <a:srgbClr val="F2B880"/>
+                </a:solidFill>
+                <a:latin typeface="Arial"/>
+              </a:rPr>
+              <a:t>viscous part: 2∫(…)(−6η_gR²Ṙ/r³)dr/r → −4η_g Ṙ/R</a:t>
+            </a:r>
+          </a:p>
+        </p:txBody>
+      </p:sp>
+      <p:sp>
+        <p:nvSpPr>
+          <p:cNvPr id="44" name="A-E10 text 42" descr="sci-ppt:o042"/>
+          <p:cNvSpPr txBox="1"/>
+          <p:nvPr/>
+        </p:nvSpPr>
+        <p:spPr>
+          <a:xfrm>
+            <a:off x="6995160" y="3474720"/>
+            <a:ext cx="4754880" cy="417576"/>
+          </a:xfrm>
+          <a:prstGeom prst="rect">
+            <a:avLst/>
+          </a:prstGeom>
+          <a:noFill/>
+          <a:effectLst/>
+        </p:spPr>
+        <p:txBody>
+          <a:bodyPr wrap="none" lIns="18288" rIns="18288" tIns="18288" bIns="18288" anchor="t">
+            <a:spAutoFit/>
+          </a:bodyPr>
+          <a:lstStyle/>
+          <a:p>
+            <a:pPr algn="l">
+              <a:spcAft>
+                <a:spcPts val="0"/>
+              </a:spcAft>
+            </a:pPr>
+            <a:r>
+              <a:rPr sz="1200" b="0" i="0">
+                <a:solidFill>
+                  <a:srgbClr val="B4C7D2"/>
+                </a:solidFill>
+                <a:latin typeface="Arial"/>
+              </a:rPr>
+              <a:t>Acceleration and viscous stress give two distinct radial</a:t>
+            </a:r>
+          </a:p>
+          <a:p>
+            <a:pPr algn="l">
+              <a:spcAft>
+                <a:spcPts val="0"/>
+              </a:spcAft>
+            </a:pPr>
+            <a:r>
+              <a:rPr sz="1200" b="0" i="0">
+                <a:solidFill>
+                  <a:srgbClr val="B4C7D2"/>
+                </a:solidFill>
+                <a:latin typeface="Arial"/>
+              </a:rPr>
+              <a:t>contributions.</a:t>
+            </a:r>
+          </a:p>
+        </p:txBody>
+      </p:sp>
+      <p:sp>
+        <p:nvSpPr>
+          <p:cNvPr id="45" name="A-E10 text 43" descr="sci-ppt:o043"/>
+          <p:cNvSpPr txBox="1"/>
+          <p:nvPr/>
+        </p:nvSpPr>
+        <p:spPr>
+          <a:xfrm>
+            <a:off x="914400" y="5733288"/>
+            <a:ext cx="10972800" cy="231648"/>
+          </a:xfrm>
+          <a:prstGeom prst="rect">
+            <a:avLst/>
+          </a:prstGeom>
+          <a:noFill/>
+          <a:effectLst/>
+        </p:spPr>
+        <p:txBody>
+          <a:bodyPr wrap="none" lIns="18288" rIns="18288" tIns="18288" bIns="18288" anchor="t">
+            <a:spAutoFit/>
+          </a:bodyPr>
+          <a:lstStyle/>
+          <a:p>
+            <a:pPr algn="l">
+              <a:spcAft>
+                <a:spcPts val="0"/>
+              </a:spcAft>
+            </a:pPr>
+            <a:r>
+              <a:rPr sz="1200" b="0" i="0">
                 <a:solidFill>
                   <a:srgbClr val="E7F0F3"/>
                 </a:solidFill>
                 <a:latin typeface="Arial"/>
               </a:rPr>
-              <a:t>r₀</a:t>
-            </a:r>
-          </a:p>
-        </p:txBody>
-      </p:sp>
-      <p:sp>
-        <p:nvSpPr>
-          <p:cNvPr id="9" name="ellipse 7" descr="sci-ppt:obj-007"/>
-          <p:cNvSpPr/>
-          <p:nvPr/>
-        </p:nvSpPr>
-        <p:spPr>
-          <a:xfrm>
-            <a:off x="4682139" y="750219"/>
-            <a:ext cx="1791401" cy="1791401"/>
-          </a:xfrm>
-          <a:prstGeom prst="ellipse">
-            <a:avLst/>
-          </a:prstGeom>
-          <a:noFill/>
-          <a:ln w="17780">
-            <a:solidFill>
-              <a:srgbClr val="B4C7D2"/>
-            </a:solidFill>
-          </a:ln>
-          <a:effectLst/>
-        </p:spPr>
-        <p:txBody>
-          <a:bodyPr rtlCol="0" anchor="ctr"/>
-          <a:lstStyle/>
-          <a:p>
-            <a:pPr algn="ctr"/>
-          </a:p>
-        </p:txBody>
-      </p:sp>
-      <p:sp>
-        <p:nvSpPr>
-          <p:cNvPr id="10" name="ellipse 8" descr="sci-ppt:obj-008"/>
-          <p:cNvSpPr/>
-          <p:nvPr/>
-        </p:nvSpPr>
-        <p:spPr>
-          <a:xfrm>
-            <a:off x="4864608" y="932688"/>
-            <a:ext cx="1426464" cy="1426464"/>
-          </a:xfrm>
-          <a:prstGeom prst="ellipse">
-            <a:avLst/>
-          </a:prstGeom>
-          <a:solidFill>
-            <a:srgbClr val="213E4B"/>
-          </a:solidFill>
-          <a:ln w="17780">
-            <a:solidFill>
-              <a:srgbClr val="B4C7D2"/>
-            </a:solidFill>
-          </a:ln>
-          <a:effectLst/>
-        </p:spPr>
-        <p:txBody>
-          <a:bodyPr rtlCol="0" anchor="ctr"/>
-          <a:lstStyle/>
-          <a:p>
-            <a:pPr algn="ctr"/>
-          </a:p>
-        </p:txBody>
-      </p:sp>
-      <p:cxnSp>
-        <p:nvCxnSpPr>
-          <p:cNvPr id="11" name="arrow 9" descr="sci-ppt:obj-009"/>
-          <p:cNvCxnSpPr/>
-          <p:nvPr/>
-        </p:nvCxnSpPr>
-        <p:spPr>
-          <a:xfrm>
-            <a:off x="5577840" y="1645920"/>
-            <a:ext cx="713232" cy="0"/>
-          </a:xfrm>
-          <a:prstGeom prst="line">
-            <a:avLst/>
-          </a:prstGeom>
-          <a:ln w="21590">
-            <a:solidFill>
-              <a:srgbClr val="8EDBD4"/>
-            </a:solidFill>
-            <a:headEnd type="none" w="med" len="med"/>
-            <a:tailEnd type="triangle" w="med" len="med"/>
-          </a:ln>
-          <a:effectLst/>
-        </p:spPr>
-      </p:cxnSp>
-      <p:sp>
-        <p:nvSpPr>
-          <p:cNvPr id="12" name="text 10" descr="sci-ppt:obj-010"/>
+              <a:t>Numerical check with R = 30 µm, Ṙ = −10 m/s, R̈ = 2×10⁶ m/s²: area under aᵣ agrees with R R̈ + 3Ṙ²/2 to 0.0000 %.</a:t>
+            </a:r>
+          </a:p>
+        </p:txBody>
+      </p:sp>
+      <p:sp>
+        <p:nvSpPr>
+          <p:cNvPr id="46" name="A-E10 text 44" descr="sci-ppt:o044"/>
           <p:cNvSpPr txBox="1"/>
           <p:nvPr/>
         </p:nvSpPr>
         <p:spPr>
           <a:xfrm>
-            <a:off x="5952744" y="1271016"/>
-            <a:ext cx="640080" cy="310896"/>
+            <a:off x="320040" y="6510528"/>
+            <a:ext cx="11521440" cy="200660"/>
           </a:xfrm>
           <a:prstGeom prst="rect">
             <a:avLst/>
@@ -3430,7 +6307,7 @@
           <a:effectLst/>
         </p:spPr>
         <p:txBody>
-          <a:bodyPr wrap="none" lIns="0" rIns="0" tIns="0" bIns="0" anchor="ctr">
+          <a:bodyPr wrap="none" lIns="18288" rIns="18288" tIns="18288" bIns="18288" anchor="t">
             <a:spAutoFit/>
           </a:bodyPr>
           <a:lstStyle/>
@@ -3441,781 +6318,13 @@
               </a:spcAft>
             </a:pPr>
             <a:r>
-              <a:rPr sz="1296" b="0" i="0">
+              <a:rPr sz="1000" b="0" i="0">
                 <a:solidFill>
-                  <a:srgbClr val="E7F0F3"/>
+                  <a:srgbClr val="B4C7D2"/>
                 </a:solidFill>
                 <a:latin typeface="Arial"/>
               </a:rPr>
-              <a:t>R</a:t>
-            </a:r>
-          </a:p>
-        </p:txBody>
-      </p:sp>
-      <p:cxnSp>
-        <p:nvCxnSpPr>
-          <p:cNvPr id="13" name="arrow 11" descr="sci-ppt:obj-011"/>
-          <p:cNvCxnSpPr/>
-          <p:nvPr/>
-        </p:nvCxnSpPr>
-        <p:spPr>
-          <a:xfrm>
-            <a:off x="5577840" y="1645920"/>
-            <a:ext cx="633355" cy="633355"/>
-          </a:xfrm>
-          <a:prstGeom prst="line">
-            <a:avLst/>
-          </a:prstGeom>
-          <a:ln w="21590">
-            <a:solidFill>
-              <a:srgbClr val="8EDBD4"/>
-            </a:solidFill>
-            <a:headEnd type="none" w="med" len="med"/>
-            <a:tailEnd type="triangle" w="med" len="med"/>
-          </a:ln>
-          <a:effectLst/>
-        </p:spPr>
-      </p:cxnSp>
-      <p:sp>
-        <p:nvSpPr>
-          <p:cNvPr id="14" name="text 12" descr="sci-ppt:obj-012"/>
-          <p:cNvSpPr txBox="1"/>
-          <p:nvPr/>
-        </p:nvSpPr>
-        <p:spPr>
-          <a:xfrm>
-            <a:off x="6373368" y="2231136"/>
-            <a:ext cx="640080" cy="310896"/>
-          </a:xfrm>
-          <a:prstGeom prst="rect">
-            <a:avLst/>
-          </a:prstGeom>
-          <a:noFill/>
-          <a:effectLst/>
-        </p:spPr>
-        <p:txBody>
-          <a:bodyPr wrap="none" lIns="0" rIns="0" tIns="0" bIns="0" anchor="ctr">
-            <a:spAutoFit/>
-          </a:bodyPr>
-          <a:lstStyle/>
-          <a:p>
-            <a:pPr algn="l">
-              <a:spcAft>
-                <a:spcPts val="0"/>
-              </a:spcAft>
-            </a:pPr>
-            <a:r>
-              <a:rPr sz="1296" b="0" i="0">
-                <a:solidFill>
-                  <a:srgbClr val="E7F0F3"/>
-                </a:solidFill>
-                <a:latin typeface="Arial"/>
-              </a:rPr>
-              <a:t>r</a:t>
-            </a:r>
-          </a:p>
-        </p:txBody>
-      </p:sp>
-      <p:cxnSp>
-        <p:nvCxnSpPr>
-          <p:cNvPr id="15" name="arrow 13" descr="sci-ppt:obj-013"/>
-          <p:cNvCxnSpPr/>
-          <p:nvPr/>
-        </p:nvCxnSpPr>
-        <p:spPr>
-          <a:xfrm>
-            <a:off x="2697480" y="1645920"/>
-            <a:ext cx="1691640" cy="0"/>
-          </a:xfrm>
-          <a:prstGeom prst="line">
-            <a:avLst/>
-          </a:prstGeom>
-          <a:ln w="21590">
-            <a:solidFill>
-              <a:srgbClr val="8EDBD4"/>
-            </a:solidFill>
-            <a:headEnd type="none" w="med" len="med"/>
-            <a:tailEnd type="triangle" w="med" len="med"/>
-          </a:ln>
-          <a:effectLst/>
-        </p:spPr>
-      </p:cxnSp>
-      <p:sp>
-        <p:nvSpPr>
-          <p:cNvPr id="16" name="text 14" descr="sci-ppt:obj-014"/>
-          <p:cNvSpPr txBox="1"/>
-          <p:nvPr/>
-        </p:nvSpPr>
-        <p:spPr>
-          <a:xfrm>
-            <a:off x="2834640" y="1143000"/>
-            <a:ext cx="2286000" cy="310896"/>
-          </a:xfrm>
-          <a:prstGeom prst="rect">
-            <a:avLst/>
-          </a:prstGeom>
-          <a:noFill/>
-          <a:effectLst/>
-        </p:spPr>
-        <p:txBody>
-          <a:bodyPr wrap="none" lIns="0" rIns="0" tIns="0" bIns="0" anchor="ctr">
-            <a:spAutoFit/>
-          </a:bodyPr>
-          <a:lstStyle/>
-          <a:p>
-            <a:pPr algn="l">
-              <a:spcAft>
-                <a:spcPts val="0"/>
-              </a:spcAft>
-            </a:pPr>
-            <a:r>
-              <a:rPr sz="1296" b="0" i="0">
-                <a:solidFill>
-                  <a:srgbClr val="E7F0F3"/>
-                </a:solidFill>
-                <a:latin typeface="Arial"/>
-              </a:rPr>
-              <a:t>Material map</a:t>
-            </a:r>
-          </a:p>
-        </p:txBody>
-      </p:sp>
-      <p:sp>
-        <p:nvSpPr>
-          <p:cNvPr id="17" name="text 15" descr="sci-ppt:obj-015"/>
-          <p:cNvSpPr txBox="1"/>
-          <p:nvPr/>
-        </p:nvSpPr>
-        <p:spPr>
-          <a:xfrm>
-            <a:off x="1005840" y="2578608"/>
-            <a:ext cx="2286000" cy="310896"/>
-          </a:xfrm>
-          <a:prstGeom prst="rect">
-            <a:avLst/>
-          </a:prstGeom>
-          <a:noFill/>
-          <a:effectLst/>
-        </p:spPr>
-        <p:txBody>
-          <a:bodyPr wrap="none" lIns="0" rIns="0" tIns="0" bIns="0" anchor="ctr">
-            <a:spAutoFit/>
-          </a:bodyPr>
-          <a:lstStyle/>
-          <a:p>
-            <a:pPr algn="l">
-              <a:spcAft>
-                <a:spcPts val="0"/>
-              </a:spcAft>
-            </a:pPr>
-            <a:r>
-              <a:rPr sz="1296" b="0" i="0">
-                <a:solidFill>
-                  <a:srgbClr val="E7F0F3"/>
-                </a:solidFill>
-                <a:latin typeface="Arial"/>
-              </a:rPr>
-              <a:t>Reference</a:t>
-            </a:r>
-          </a:p>
-        </p:txBody>
-      </p:sp>
-      <p:sp>
-        <p:nvSpPr>
-          <p:cNvPr id="18" name="text 16" descr="sci-ppt:obj-016"/>
-          <p:cNvSpPr txBox="1"/>
-          <p:nvPr/>
-        </p:nvSpPr>
-        <p:spPr>
-          <a:xfrm>
-            <a:off x="4846320" y="2660904"/>
-            <a:ext cx="3383280" cy="310896"/>
-          </a:xfrm>
-          <a:prstGeom prst="rect">
-            <a:avLst/>
-          </a:prstGeom>
-          <a:noFill/>
-          <a:effectLst/>
-        </p:spPr>
-        <p:txBody>
-          <a:bodyPr wrap="none" lIns="0" rIns="0" tIns="0" bIns="0" anchor="ctr">
-            <a:spAutoFit/>
-          </a:bodyPr>
-          <a:lstStyle/>
-          <a:p>
-            <a:pPr algn="l">
-              <a:spcAft>
-                <a:spcPts val="0"/>
-              </a:spcAft>
-            </a:pPr>
-            <a:r>
-              <a:rPr sz="1296" b="0" i="0">
-                <a:solidFill>
-                  <a:srgbClr val="E7F0F3"/>
-                </a:solidFill>
-                <a:latin typeface="Arial"/>
-              </a:rPr>
-              <a:t>Deformed: λr , λθ</a:t>
-            </a:r>
-          </a:p>
-        </p:txBody>
-      </p:sp>
-      <p:sp>
-        <p:nvSpPr>
-          <p:cNvPr id="19" name="text 17" descr="sci-ppt:obj-017"/>
-          <p:cNvSpPr txBox="1"/>
-          <p:nvPr/>
-        </p:nvSpPr>
-        <p:spPr>
-          <a:xfrm>
-            <a:off x="6839712" y="777240"/>
-            <a:ext cx="1645920" cy="310896"/>
-          </a:xfrm>
-          <a:prstGeom prst="rect">
-            <a:avLst/>
-          </a:prstGeom>
-          <a:noFill/>
-          <a:effectLst/>
-        </p:spPr>
-        <p:txBody>
-          <a:bodyPr wrap="none" lIns="0" rIns="0" tIns="0" bIns="0" anchor="ctr">
-            <a:spAutoFit/>
-          </a:bodyPr>
-          <a:lstStyle/>
-          <a:p>
-            <a:pPr algn="l">
-              <a:spcAft>
-                <a:spcPts val="0"/>
-              </a:spcAft>
-            </a:pPr>
-            <a:r>
-              <a:rPr sz="1296" b="0" i="0">
-                <a:solidFill>
-                  <a:srgbClr val="E7F0F3"/>
-                </a:solidFill>
-                <a:latin typeface="Arial"/>
-              </a:rPr>
-              <a:t>Gg , ηg</a:t>
-            </a:r>
-          </a:p>
-        </p:txBody>
-      </p:sp>
-      <p:sp>
-        <p:nvSpPr>
-          <p:cNvPr id="20" name="text 18" descr="sci-ppt:obj-018"/>
-          <p:cNvSpPr txBox="1"/>
-          <p:nvPr/>
-        </p:nvSpPr>
-        <p:spPr>
-          <a:xfrm>
-            <a:off x="6839712" y="1207008"/>
-            <a:ext cx="1828800" cy="310896"/>
-          </a:xfrm>
-          <a:prstGeom prst="rect">
-            <a:avLst/>
-          </a:prstGeom>
-          <a:noFill/>
-          <a:effectLst/>
-        </p:spPr>
-        <p:txBody>
-          <a:bodyPr wrap="none" lIns="0" rIns="0" tIns="0" bIns="0" anchor="ctr">
-            <a:spAutoFit/>
-          </a:bodyPr>
-          <a:lstStyle/>
-          <a:p>
-            <a:pPr algn="l">
-              <a:spcAft>
-                <a:spcPts val="0"/>
-              </a:spcAft>
-            </a:pPr>
-            <a:r>
-              <a:rPr sz="1296" b="0" i="0">
-                <a:solidFill>
-                  <a:srgbClr val="E7F0F3"/>
-                </a:solidFill>
-                <a:latin typeface="Arial"/>
-              </a:rPr>
-              <a:t>σrr , σθθ</a:t>
-            </a:r>
-          </a:p>
-        </p:txBody>
-      </p:sp>
-      <p:sp>
-        <p:nvSpPr>
-          <p:cNvPr id="21" name="text 19" descr="sci-ppt:obj-019"/>
-          <p:cNvSpPr txBox="1"/>
-          <p:nvPr/>
-        </p:nvSpPr>
-        <p:spPr>
-          <a:xfrm>
-            <a:off x="6839712" y="1645920"/>
-            <a:ext cx="1371600" cy="310896"/>
-          </a:xfrm>
-          <a:prstGeom prst="rect">
-            <a:avLst/>
-          </a:prstGeom>
-          <a:noFill/>
-          <a:effectLst/>
-        </p:spPr>
-        <p:txBody>
-          <a:bodyPr wrap="none" lIns="0" rIns="0" tIns="0" bIns="0" anchor="ctr">
-            <a:spAutoFit/>
-          </a:bodyPr>
-          <a:lstStyle/>
-          <a:p>
-            <a:pPr algn="l">
-              <a:spcAft>
-                <a:spcPts val="0"/>
-              </a:spcAft>
-            </a:pPr>
-            <a:r>
-              <a:rPr sz="1296" b="0" i="0">
-                <a:solidFill>
-                  <a:srgbClr val="E7F0F3"/>
-                </a:solidFill>
-                <a:latin typeface="Arial"/>
-              </a:rPr>
-              <a:t>p∞</a:t>
-            </a:r>
-          </a:p>
-        </p:txBody>
-      </p:sp>
-      <p:sp>
-        <p:nvSpPr>
-          <p:cNvPr id="22" name="text 20" descr="sci-ppt:obj-020"/>
-          <p:cNvSpPr txBox="1"/>
-          <p:nvPr/>
-        </p:nvSpPr>
-        <p:spPr>
-          <a:xfrm>
-            <a:off x="5266944" y="1682496"/>
-            <a:ext cx="822960" cy="310896"/>
-          </a:xfrm>
-          <a:prstGeom prst="rect">
-            <a:avLst/>
-          </a:prstGeom>
-          <a:noFill/>
-          <a:effectLst/>
-        </p:spPr>
-        <p:txBody>
-          <a:bodyPr wrap="none" lIns="0" rIns="0" tIns="0" bIns="0" anchor="ctr">
-            <a:spAutoFit/>
-          </a:bodyPr>
-          <a:lstStyle/>
-          <a:p>
-            <a:pPr algn="l">
-              <a:spcAft>
-                <a:spcPts val="0"/>
-              </a:spcAft>
-            </a:pPr>
-            <a:r>
-              <a:rPr sz="1296" b="0" i="0">
-                <a:solidFill>
-                  <a:srgbClr val="E7F0F3"/>
-                </a:solidFill>
-                <a:latin typeface="Arial"/>
-              </a:rPr>
-              <a:t>pb</a:t>
-            </a:r>
-          </a:p>
-        </p:txBody>
-      </p:sp>
-      <p:sp>
-        <p:nvSpPr>
-          <p:cNvPr id="23" name="text 21" descr="sci-ppt:obj-021"/>
-          <p:cNvSpPr txBox="1"/>
-          <p:nvPr/>
-        </p:nvSpPr>
-        <p:spPr>
-          <a:xfrm>
-            <a:off x="868680" y="2990088"/>
-            <a:ext cx="7772400" cy="310896"/>
-          </a:xfrm>
-          <a:prstGeom prst="rect">
-            <a:avLst/>
-          </a:prstGeom>
-          <a:noFill/>
-          <a:effectLst/>
-        </p:spPr>
-        <p:txBody>
-          <a:bodyPr wrap="none" lIns="0" rIns="0" tIns="0" bIns="0" anchor="ctr">
-            <a:spAutoFit/>
-          </a:bodyPr>
-          <a:lstStyle/>
-          <a:p>
-            <a:pPr algn="l">
-              <a:spcAft>
-                <a:spcPts val="0"/>
-              </a:spcAft>
-            </a:pPr>
-            <a:r>
-              <a:rPr sz="1152" b="0" i="0">
-                <a:solidFill>
-                  <a:srgbClr val="E7F0F3"/>
-                </a:solidFill>
-                <a:latin typeface="Arial"/>
-              </a:rPr>
-              <a:t>r₀³ − Rref³ = r³ − R³ ; radial coordinates point outward</a:t>
-            </a:r>
-          </a:p>
-        </p:txBody>
-      </p:sp>
-      <p:sp>
-        <p:nvSpPr>
-          <p:cNvPr id="24" name="text 22" descr="sci-ppt:obj-022"/>
-          <p:cNvSpPr txBox="1"/>
-          <p:nvPr/>
-        </p:nvSpPr>
-        <p:spPr>
-          <a:xfrm>
-            <a:off x="256032" y="3465576"/>
-            <a:ext cx="7315200" cy="310896"/>
-          </a:xfrm>
-          <a:prstGeom prst="rect">
-            <a:avLst/>
-          </a:prstGeom>
-          <a:noFill/>
-          <a:effectLst/>
-        </p:spPr>
-        <p:txBody>
-          <a:bodyPr wrap="none" lIns="0" rIns="0" tIns="0" bIns="0" anchor="ctr">
-            <a:spAutoFit/>
-          </a:bodyPr>
-          <a:lstStyle/>
-          <a:p>
-            <a:pPr algn="l">
-              <a:spcAft>
-                <a:spcPts val="0"/>
-              </a:spcAft>
-            </a:pPr>
-            <a:r>
-              <a:rPr sz="1296" b="0" i="0">
-                <a:solidFill>
-                  <a:srgbClr val="8EDBD4"/>
-                </a:solidFill>
-                <a:latin typeface="Arial"/>
-              </a:rPr>
-              <a:t>Variables and physical limits</a:t>
-            </a:r>
-          </a:p>
-        </p:txBody>
-      </p:sp>
-      <p:sp>
-        <p:nvSpPr>
-          <p:cNvPr id="25" name="text 23" descr="sci-ppt:obj-023"/>
-          <p:cNvSpPr txBox="1"/>
-          <p:nvPr/>
-        </p:nvSpPr>
-        <p:spPr>
-          <a:xfrm>
-            <a:off x="365760" y="3813048"/>
-            <a:ext cx="8412480" cy="310896"/>
-          </a:xfrm>
-          <a:prstGeom prst="rect">
-            <a:avLst/>
-          </a:prstGeom>
-          <a:noFill/>
-          <a:effectLst/>
-        </p:spPr>
-        <p:txBody>
-          <a:bodyPr wrap="none" lIns="0" rIns="0" tIns="0" bIns="0" anchor="ctr">
-            <a:spAutoFit/>
-          </a:bodyPr>
-          <a:lstStyle/>
-          <a:p>
-            <a:pPr algn="l">
-              <a:spcAft>
-                <a:spcPts val="0"/>
-              </a:spcAft>
-            </a:pPr>
-            <a:r>
-              <a:rPr sz="1152" b="0" i="0">
-                <a:solidFill>
-                  <a:srgbClr val="E7F0F3"/>
-                </a:solidFill>
-                <a:latin typeface="Arial"/>
-              </a:rPr>
-              <a:t>• R, Ṙ, R̈: wall motion</a:t>
-            </a:r>
-          </a:p>
-        </p:txBody>
-      </p:sp>
-      <p:sp>
-        <p:nvSpPr>
-          <p:cNvPr id="26" name="text 24" descr="sci-ppt:obj-024"/>
-          <p:cNvSpPr txBox="1"/>
-          <p:nvPr/>
-        </p:nvSpPr>
-        <p:spPr>
-          <a:xfrm>
-            <a:off x="365760" y="4023360"/>
-            <a:ext cx="8412480" cy="310896"/>
-          </a:xfrm>
-          <a:prstGeom prst="rect">
-            <a:avLst/>
-          </a:prstGeom>
-          <a:noFill/>
-          <a:effectLst/>
-        </p:spPr>
-        <p:txBody>
-          <a:bodyPr wrap="none" lIns="0" rIns="0" tIns="0" bIns="0" anchor="ctr">
-            <a:spAutoFit/>
-          </a:bodyPr>
-          <a:lstStyle/>
-          <a:p>
-            <a:pPr algn="l">
-              <a:spcAft>
-                <a:spcPts val="0"/>
-              </a:spcAft>
-            </a:pPr>
-            <a:r>
-              <a:rPr sz="1152" b="0" i="0">
-                <a:solidFill>
-                  <a:srgbClr val="E7F0F3"/>
-                </a:solidFill>
-                <a:latin typeface="Arial"/>
-              </a:rPr>
-              <a:t>• ar: material acceleration at r</a:t>
-            </a:r>
-          </a:p>
-        </p:txBody>
-      </p:sp>
-      <p:sp>
-        <p:nvSpPr>
-          <p:cNvPr id="27" name="text 25" descr="sci-ppt:obj-025"/>
-          <p:cNvSpPr txBox="1"/>
-          <p:nvPr/>
-        </p:nvSpPr>
-        <p:spPr>
-          <a:xfrm>
-            <a:off x="365760" y="4233672"/>
-            <a:ext cx="8412480" cy="310896"/>
-          </a:xfrm>
-          <a:prstGeom prst="rect">
-            <a:avLst/>
-          </a:prstGeom>
-          <a:noFill/>
-          <a:effectLst/>
-        </p:spPr>
-        <p:txBody>
-          <a:bodyPr wrap="none" lIns="0" rIns="0" tIns="0" bIns="0" anchor="ctr">
-            <a:spAutoFit/>
-          </a:bodyPr>
-          <a:lstStyle/>
-          <a:p>
-            <a:pPr algn="l">
-              <a:spcAft>
-                <a:spcPts val="0"/>
-              </a:spcAft>
-            </a:pPr>
-            <a:r>
-              <a:rPr sz="1152" b="0" i="0">
-                <a:solidFill>
-                  <a:srgbClr val="E7F0F3"/>
-                </a:solidFill>
-                <a:latin typeface="Arial"/>
-              </a:rPr>
-              <a:t>• ρg: exterior inertia</a:t>
-            </a:r>
-          </a:p>
-        </p:txBody>
-      </p:sp>
-      <p:sp>
-        <p:nvSpPr>
-          <p:cNvPr id="28" name="text 26" descr="sci-ppt:obj-026"/>
-          <p:cNvSpPr txBox="1"/>
-          <p:nvPr/>
-        </p:nvSpPr>
-        <p:spPr>
-          <a:xfrm>
-            <a:off x="365760" y="4443984"/>
-            <a:ext cx="8412480" cy="310896"/>
-          </a:xfrm>
-          <a:prstGeom prst="rect">
-            <a:avLst/>
-          </a:prstGeom>
-          <a:noFill/>
-          <a:effectLst/>
-        </p:spPr>
-        <p:txBody>
-          <a:bodyPr wrap="none" lIns="0" rIns="0" tIns="0" bIns="0" anchor="ctr">
-            <a:spAutoFit/>
-          </a:bodyPr>
-          <a:lstStyle/>
-          <a:p>
-            <a:pPr algn="l">
-              <a:spcAft>
-                <a:spcPts val="0"/>
-              </a:spcAft>
-            </a:pPr>
-            <a:r>
-              <a:rPr sz="1152" b="0" i="0">
-                <a:solidFill>
-                  <a:srgbClr val="E7F0F3"/>
-                </a:solidFill>
-                <a:latin typeface="Arial"/>
-              </a:rPr>
-              <a:t>• Trr, Tθθ: total stresses</a:t>
-            </a:r>
-          </a:p>
-        </p:txBody>
-      </p:sp>
-      <p:sp>
-        <p:nvSpPr>
-          <p:cNvPr id="29" name="text 27" descr="sci-ppt:obj-027"/>
-          <p:cNvSpPr txBox="1"/>
-          <p:nvPr/>
-        </p:nvSpPr>
-        <p:spPr>
-          <a:xfrm>
-            <a:off x="365760" y="4654296"/>
-            <a:ext cx="8412480" cy="310896"/>
-          </a:xfrm>
-          <a:prstGeom prst="rect">
-            <a:avLst/>
-          </a:prstGeom>
-          <a:noFill/>
-          <a:effectLst/>
-        </p:spPr>
-        <p:txBody>
-          <a:bodyPr wrap="none" lIns="0" rIns="0" tIns="0" bIns="0" anchor="ctr">
-            <a:spAutoFit/>
-          </a:bodyPr>
-          <a:lstStyle/>
-          <a:p>
-            <a:pPr algn="l">
-              <a:spcAft>
-                <a:spcPts val="0"/>
-              </a:spcAft>
-            </a:pPr>
-            <a:r>
-              <a:rPr sz="1152" b="0" i="0">
-                <a:solidFill>
-                  <a:srgbClr val="E7F0F3"/>
-                </a:solidFill>
-                <a:latin typeface="Arial"/>
-              </a:rPr>
-              <a:t>• 4ηgṘ/R: signed resistance</a:t>
-            </a:r>
-          </a:p>
-        </p:txBody>
-      </p:sp>
-      <p:sp>
-        <p:nvSpPr>
-          <p:cNvPr id="30" name="text 28" descr="sci-ppt:obj-028"/>
-          <p:cNvSpPr txBox="1"/>
-          <p:nvPr/>
-        </p:nvSpPr>
-        <p:spPr>
-          <a:xfrm>
-            <a:off x="365760" y="4864608"/>
-            <a:ext cx="8412480" cy="310896"/>
-          </a:xfrm>
-          <a:prstGeom prst="rect">
-            <a:avLst/>
-          </a:prstGeom>
-          <a:noFill/>
-          <a:effectLst/>
-        </p:spPr>
-        <p:txBody>
-          <a:bodyPr wrap="none" lIns="0" rIns="0" tIns="0" bIns="0" anchor="ctr">
-            <a:spAutoFit/>
-          </a:bodyPr>
-          <a:lstStyle/>
-          <a:p>
-            <a:pPr algn="l">
-              <a:spcAft>
-                <a:spcPts val="0"/>
-              </a:spcAft>
-            </a:pPr>
-            <a:r>
-              <a:rPr sz="1152" b="0" i="0">
-                <a:solidFill>
-                  <a:srgbClr val="E7F0F3"/>
-                </a:solidFill>
-                <a:latin typeface="Arial"/>
-              </a:rPr>
-              <a:t>• ur, t</a:t>
-            </a:r>
-          </a:p>
-        </p:txBody>
-      </p:sp>
-      <p:sp>
-        <p:nvSpPr>
-          <p:cNvPr id="31" name="text 29" descr="sci-ppt:obj-029"/>
-          <p:cNvSpPr txBox="1"/>
-          <p:nvPr/>
-        </p:nvSpPr>
-        <p:spPr>
-          <a:xfrm>
-            <a:off x="365760" y="5074920"/>
-            <a:ext cx="8412480" cy="310896"/>
-          </a:xfrm>
-          <a:prstGeom prst="rect">
-            <a:avLst/>
-          </a:prstGeom>
-          <a:noFill/>
-          <a:effectLst/>
-        </p:spPr>
-        <p:txBody>
-          <a:bodyPr wrap="none" lIns="0" rIns="0" tIns="0" bIns="0" anchor="ctr">
-            <a:spAutoFit/>
-          </a:bodyPr>
-          <a:lstStyle/>
-          <a:p>
-            <a:pPr algn="l">
-              <a:spcAft>
-                <a:spcPts val="0"/>
-              </a:spcAft>
-            </a:pPr>
-            <a:r>
-              <a:rPr sz="1152" b="0" i="0">
-                <a:solidFill>
-                  <a:srgbClr val="E7F0F3"/>
-                </a:solidFill>
-                <a:latin typeface="Arial"/>
-              </a:rPr>
-              <a:t>Both Eulerian and convective acceleration are retained</a:t>
-            </a:r>
-          </a:p>
-        </p:txBody>
-      </p:sp>
-      <p:sp>
-        <p:nvSpPr>
-          <p:cNvPr id="32" name="text 30" descr="sci-ppt:obj-030"/>
-          <p:cNvSpPr txBox="1"/>
-          <p:nvPr/>
-        </p:nvSpPr>
-        <p:spPr>
-          <a:xfrm>
-            <a:off x="365760" y="5285232"/>
-            <a:ext cx="8412480" cy="310896"/>
-          </a:xfrm>
-          <a:prstGeom prst="rect">
-            <a:avLst/>
-          </a:prstGeom>
-          <a:noFill/>
-          <a:effectLst/>
-        </p:spPr>
-        <p:txBody>
-          <a:bodyPr wrap="none" lIns="0" rIns="0" tIns="0" bIns="0" anchor="ctr">
-            <a:spAutoFit/>
-          </a:bodyPr>
-          <a:lstStyle/>
-          <a:p>
-            <a:pPr algn="l">
-              <a:spcAft>
-                <a:spcPts val="0"/>
-              </a:spcAft>
-            </a:pPr>
-            <a:r>
-              <a:rPr sz="1152" b="0" i="0">
-                <a:solidFill>
-                  <a:srgbClr val="E7F0F3"/>
-                </a:solidFill>
-                <a:latin typeface="Arial"/>
-              </a:rPr>
-              <a:t>The infinite exterior supplies effective inertia</a:t>
+              <a:t>Evaluated integrals of Eq. A-E10 (quadrature to 400R plus the 1/r² tail beyond it, added analytically).</a:t>
             </a:r>
           </a:p>
         </p:txBody>
